--- a/carta-de-apresentacao/carta-de-apresentacao-loop-skate-park.pptx
+++ b/carta-de-apresentacao/carta-de-apresentacao-loop-skate-park.pptx
@@ -1254,7 +1254,7 @@
         </p:blipFill>
         <p:spPr>
           <a:xfrm>
-            <a:off x="2409444" y="2464402"/>
+            <a:off x="2409444" y="2395364"/>
             <a:ext cx="2743200" cy="1209867"/>
           </a:xfrm>
           <a:prstGeom prst="rect">
@@ -1270,7 +1270,7 @@
         </p:nvSpPr>
         <p:spPr>
           <a:xfrm>
-            <a:off x="713232" y="4405790"/>
+            <a:off x="713232" y="4336751"/>
             <a:ext cx="6135624" cy="201168"/>
           </a:xfrm>
           <a:prstGeom prst="rect">
@@ -1298,7 +1298,7 @@
                 <a:ea typeface="Oswald" pitchFamily="34" charset="-122"/>
                 <a:cs typeface="Oswald" pitchFamily="34" charset="-120"/>
               </a:rPr>
-              <a:t>LOOP SKATE PARK · BELO HORIZONTE / MG</a:t>
+              <a:t>LOOP SKATE PARK · BELO HORIZONTE – MG</a:t>
             </a:r>
             <a:endParaRPr lang="en-US" sz="1000" dirty="0"/>
           </a:p>
@@ -1312,8 +1312,8 @@
         </p:nvSpPr>
         <p:spPr>
           <a:xfrm>
-            <a:off x="713232" y="5027582"/>
-            <a:ext cx="6135624" cy="1478280"/>
+            <a:off x="713232" y="4958543"/>
+            <a:ext cx="6135624" cy="1579781"/>
           </a:xfrm>
           <a:prstGeom prst="rect">
             <a:avLst/>
@@ -1327,7 +1327,7 @@
           <a:p>
             <a:pPr algn="ctr" indent="0" marL="0">
               <a:lnSpc>
-                <a:spcPts val="5100"/>
+                <a:spcPts val="5500"/>
               </a:lnSpc>
               <a:buNone/>
             </a:pPr>
@@ -1347,7 +1347,7 @@
           <a:p>
             <a:pPr algn="ctr" indent="0" marL="0">
               <a:lnSpc>
-                <a:spcPts val="5100"/>
+                <a:spcPts val="5500"/>
               </a:lnSpc>
               <a:buNone/>
             </a:pPr>
@@ -1374,7 +1374,7 @@
         </p:nvSpPr>
         <p:spPr>
           <a:xfrm>
-            <a:off x="3072384" y="6743606"/>
+            <a:off x="3072384" y="6776068"/>
             <a:ext cx="1417320" cy="402336"/>
           </a:xfrm>
           <a:prstGeom prst="roundRect">
@@ -1396,7 +1396,7 @@
         </p:nvSpPr>
         <p:spPr>
           <a:xfrm>
-            <a:off x="3072384" y="6835046"/>
+            <a:off x="3072384" y="6867508"/>
             <a:ext cx="1417320" cy="237744"/>
           </a:xfrm>
           <a:prstGeom prst="rect">
@@ -1438,7 +1438,7 @@
         </p:nvSpPr>
         <p:spPr>
           <a:xfrm>
-            <a:off x="713232" y="7658006"/>
+            <a:off x="713232" y="7690468"/>
             <a:ext cx="6135624" cy="274320"/>
           </a:xfrm>
           <a:prstGeom prst="rect">
@@ -1704,7 +1704,7 @@
         </p:nvSpPr>
         <p:spPr>
           <a:xfrm>
-            <a:off x="713232" y="2189530"/>
+            <a:off x="713232" y="2152954"/>
             <a:ext cx="91440" cy="617827"/>
           </a:xfrm>
           <a:prstGeom prst="rect">
@@ -1724,7 +1724,7 @@
         </p:nvSpPr>
         <p:spPr>
           <a:xfrm>
-            <a:off x="987552" y="2216962"/>
+            <a:off x="987552" y="2180386"/>
             <a:ext cx="5861304" cy="581251"/>
           </a:xfrm>
           <a:prstGeom prst="rect">
@@ -1800,7 +1800,7 @@
         </p:nvSpPr>
         <p:spPr>
           <a:xfrm>
-            <a:off x="713232" y="3143823"/>
+            <a:off x="713232" y="3107247"/>
             <a:ext cx="6135624" cy="702713"/>
           </a:xfrm>
           <a:prstGeom prst="rect">
@@ -1978,7 +1978,7 @@
         </p:nvSpPr>
         <p:spPr>
           <a:xfrm>
-            <a:off x="713232" y="4030965"/>
+            <a:off x="713232" y="3994389"/>
             <a:ext cx="6135624" cy="918662"/>
           </a:xfrm>
           <a:prstGeom prst="rect">
@@ -2020,7 +2020,7 @@
         </p:nvSpPr>
         <p:spPr>
           <a:xfrm>
-            <a:off x="713232" y="5134056"/>
+            <a:off x="713232" y="5097480"/>
             <a:ext cx="6135624" cy="1134612"/>
           </a:xfrm>
           <a:prstGeom prst="rect">
@@ -2062,7 +2062,7 @@
         </p:nvSpPr>
         <p:spPr>
           <a:xfrm>
-            <a:off x="713232" y="6453097"/>
+            <a:off x="713232" y="6416521"/>
             <a:ext cx="6135624" cy="729538"/>
           </a:xfrm>
           <a:prstGeom prst="roundRect">
@@ -2084,17 +2084,17 @@
         </p:nvSpPr>
         <p:spPr>
           <a:xfrm>
-            <a:off x="1042416" y="6654265"/>
-            <a:ext cx="5477256" cy="363778"/>
-          </a:xfrm>
-          <a:prstGeom prst="rect">
-            <a:avLst/>
-          </a:prstGeom>
-          <a:noFill/>
-          <a:ln/>
-        </p:spPr>
-        <p:txBody>
-          <a:bodyPr wrap="square" lIns="0" tIns="0" rIns="0" bIns="0" rtlCol="0" anchor="t"/>
+            <a:off x="1042416" y="6416521"/>
+            <a:ext cx="5477256" cy="729538"/>
+          </a:xfrm>
+          <a:prstGeom prst="rect">
+            <a:avLst/>
+          </a:prstGeom>
+          <a:noFill/>
+          <a:ln/>
+        </p:spPr>
+        <p:txBody>
+          <a:bodyPr wrap="square" lIns="0" tIns="0" rIns="0" bIns="0" rtlCol="0" anchor="ctr"/>
           <a:lstStyle/>
           <a:p>
             <a:pPr indent="0" marL="0">
@@ -2126,7 +2126,7 @@
         </p:nvSpPr>
         <p:spPr>
           <a:xfrm rot="10800000">
-            <a:off x="6245352" y="7173491"/>
+            <a:off x="6245352" y="7136915"/>
             <a:ext cx="237744" cy="182880"/>
           </a:xfrm>
           <a:prstGeom prst="triangle">
@@ -2146,8 +2146,8 @@
         </p:nvSpPr>
         <p:spPr>
           <a:xfrm>
-            <a:off x="681228" y="7589334"/>
-            <a:ext cx="3040380" cy="1892808"/>
+            <a:off x="713232" y="7584762"/>
+            <a:ext cx="2976372" cy="1755648"/>
           </a:xfrm>
           <a:prstGeom prst="rect">
             <a:avLst/>
@@ -2174,8 +2174,8 @@
         </p:blipFill>
         <p:spPr>
           <a:xfrm>
-            <a:off x="713232" y="7621338"/>
-            <a:ext cx="2976372" cy="1828800"/>
+            <a:off x="745236" y="7616766"/>
+            <a:ext cx="2912364" cy="1691640"/>
           </a:xfrm>
           <a:prstGeom prst="rect">
             <a:avLst/>
@@ -2190,7 +2190,7 @@
         </p:nvSpPr>
         <p:spPr>
           <a:xfrm>
-            <a:off x="713232" y="9559866"/>
+            <a:off x="713232" y="9523290"/>
             <a:ext cx="2976372" cy="173736"/>
           </a:xfrm>
           <a:prstGeom prst="rect">
@@ -2232,8 +2232,8 @@
         </p:nvSpPr>
         <p:spPr>
           <a:xfrm>
-            <a:off x="3840480" y="7589334"/>
-            <a:ext cx="3040380" cy="1892808"/>
+            <a:off x="3872484" y="7584762"/>
+            <a:ext cx="2976372" cy="1755648"/>
           </a:xfrm>
           <a:prstGeom prst="rect">
             <a:avLst/>
@@ -2260,8 +2260,8 @@
         </p:blipFill>
         <p:spPr>
           <a:xfrm>
-            <a:off x="3872484" y="7621338"/>
-            <a:ext cx="2976372" cy="1828800"/>
+            <a:off x="3904488" y="7616766"/>
+            <a:ext cx="2912364" cy="1691640"/>
           </a:xfrm>
           <a:prstGeom prst="rect">
             <a:avLst/>
@@ -2276,7 +2276,7 @@
         </p:nvSpPr>
         <p:spPr>
           <a:xfrm>
-            <a:off x="3872484" y="9559866"/>
+            <a:off x="3872484" y="9523290"/>
             <a:ext cx="2976372" cy="173736"/>
           </a:xfrm>
           <a:prstGeom prst="rect">
@@ -2318,7 +2318,7 @@
         </p:nvSpPr>
         <p:spPr>
           <a:xfrm>
-            <a:off x="713232" y="10122408"/>
+            <a:off x="713232" y="10049256"/>
             <a:ext cx="6135624" cy="18288"/>
           </a:xfrm>
           <a:prstGeom prst="rect">
@@ -2338,7 +2338,7 @@
         </p:nvSpPr>
         <p:spPr>
           <a:xfrm>
-            <a:off x="713232" y="10250424"/>
+            <a:off x="713232" y="10177272"/>
             <a:ext cx="5586984" cy="182880"/>
           </a:xfrm>
           <a:prstGeom prst="rect">
@@ -2380,7 +2380,7 @@
         </p:nvSpPr>
         <p:spPr>
           <a:xfrm>
-            <a:off x="6300216" y="10232136"/>
+            <a:off x="6300216" y="10158984"/>
             <a:ext cx="548640" cy="219456"/>
           </a:xfrm>
           <a:prstGeom prst="rect">
@@ -2584,7 +2584,7 @@
         </p:nvSpPr>
         <p:spPr>
           <a:xfrm>
-            <a:off x="713232" y="2216962"/>
+            <a:off x="713232" y="2180386"/>
             <a:ext cx="6135624" cy="702713"/>
           </a:xfrm>
           <a:prstGeom prst="rect">
@@ -2626,7 +2626,7 @@
         </p:nvSpPr>
         <p:spPr>
           <a:xfrm>
-            <a:off x="713232" y="3088768"/>
+            <a:off x="713232" y="3049184"/>
             <a:ext cx="6135624" cy="702713"/>
           </a:xfrm>
           <a:prstGeom prst="rect">
@@ -2668,7 +2668,7 @@
         </p:nvSpPr>
         <p:spPr>
           <a:xfrm rot="2700000">
-            <a:off x="731520" y="4183782"/>
+            <a:off x="749214" y="4226049"/>
             <a:ext cx="173736" cy="173736"/>
           </a:xfrm>
           <a:prstGeom prst="rect">
@@ -2693,7 +2693,7 @@
         </p:nvSpPr>
         <p:spPr>
           <a:xfrm>
-            <a:off x="1115568" y="4110630"/>
+            <a:off x="1115568" y="4139181"/>
             <a:ext cx="5733288" cy="345490"/>
           </a:xfrm>
           <a:prstGeom prst="rect">
@@ -2735,7 +2735,7 @@
         </p:nvSpPr>
         <p:spPr>
           <a:xfrm>
-            <a:off x="713232" y="4626821"/>
+            <a:off x="713232" y="4652614"/>
             <a:ext cx="6135624" cy="270814"/>
           </a:xfrm>
           <a:prstGeom prst="rect">
@@ -2777,8 +2777,8 @@
         </p:nvSpPr>
         <p:spPr>
           <a:xfrm>
-            <a:off x="713232" y="5104054"/>
-            <a:ext cx="2948940" cy="1260038"/>
+            <a:off x="727520" y="5140625"/>
+            <a:ext cx="2920365" cy="1231463"/>
           </a:xfrm>
           <a:prstGeom prst="rect">
             <a:avLst/>
@@ -2802,7 +2802,7 @@
         </p:nvSpPr>
         <p:spPr>
           <a:xfrm>
-            <a:off x="950976" y="5323510"/>
+            <a:off x="950976" y="5345794"/>
             <a:ext cx="2473452" cy="232714"/>
           </a:xfrm>
           <a:prstGeom prst="rect">
@@ -2844,7 +2844,7 @@
         </p:nvSpPr>
         <p:spPr>
           <a:xfrm>
-            <a:off x="950976" y="5592800"/>
+            <a:off x="950976" y="5615083"/>
             <a:ext cx="2473452" cy="606701"/>
           </a:xfrm>
           <a:prstGeom prst="rect">
@@ -2886,8 +2886,8 @@
         </p:nvSpPr>
         <p:spPr>
           <a:xfrm>
-            <a:off x="3899916" y="5104054"/>
-            <a:ext cx="2948940" cy="1260038"/>
+            <a:off x="3914203" y="5140625"/>
+            <a:ext cx="2920365" cy="1231463"/>
           </a:xfrm>
           <a:prstGeom prst="rect">
             <a:avLst/>
@@ -2911,7 +2911,7 @@
         </p:nvSpPr>
         <p:spPr>
           <a:xfrm>
-            <a:off x="4137660" y="5323510"/>
+            <a:off x="4137660" y="5345794"/>
             <a:ext cx="2473452" cy="232714"/>
           </a:xfrm>
           <a:prstGeom prst="rect">
@@ -2953,7 +2953,7 @@
         </p:nvSpPr>
         <p:spPr>
           <a:xfrm>
-            <a:off x="4137660" y="5592800"/>
+            <a:off x="4137660" y="5615083"/>
             <a:ext cx="2473452" cy="606701"/>
           </a:xfrm>
           <a:prstGeom prst="rect">
@@ -2995,7 +2995,7 @@
         </p:nvSpPr>
         <p:spPr>
           <a:xfrm>
-            <a:off x="713232" y="6662703"/>
+            <a:off x="713232" y="6680976"/>
             <a:ext cx="6135624" cy="702713"/>
           </a:xfrm>
           <a:prstGeom prst="rect">
@@ -3037,8 +3037,8 @@
         </p:nvSpPr>
         <p:spPr>
           <a:xfrm>
-            <a:off x="681228" y="7651811"/>
-            <a:ext cx="6199632" cy="1847088"/>
+            <a:off x="713232" y="7697074"/>
+            <a:ext cx="6135624" cy="1664208"/>
           </a:xfrm>
           <a:prstGeom prst="rect">
             <a:avLst/>
@@ -3065,8 +3065,8 @@
         </p:blipFill>
         <p:spPr>
           <a:xfrm>
-            <a:off x="713232" y="7683815"/>
-            <a:ext cx="6135624" cy="1783080"/>
+            <a:off x="745236" y="7729078"/>
+            <a:ext cx="6071616" cy="1600200"/>
           </a:xfrm>
           <a:prstGeom prst="rect">
             <a:avLst/>
@@ -3081,7 +3081,7 @@
         </p:nvSpPr>
         <p:spPr>
           <a:xfrm>
-            <a:off x="713232" y="9576623"/>
+            <a:off x="713232" y="9544162"/>
             <a:ext cx="6135624" cy="173736"/>
           </a:xfrm>
           <a:prstGeom prst="rect">
@@ -3123,7 +3123,7 @@
         </p:nvSpPr>
         <p:spPr>
           <a:xfrm>
-            <a:off x="713232" y="10122408"/>
+            <a:off x="713232" y="10049256"/>
             <a:ext cx="6135624" cy="18288"/>
           </a:xfrm>
           <a:prstGeom prst="rect">
@@ -3143,7 +3143,7 @@
         </p:nvSpPr>
         <p:spPr>
           <a:xfrm>
-            <a:off x="713232" y="10250424"/>
+            <a:off x="713232" y="10177272"/>
             <a:ext cx="5586984" cy="182880"/>
           </a:xfrm>
           <a:prstGeom prst="rect">
@@ -3185,7 +3185,7 @@
         </p:nvSpPr>
         <p:spPr>
           <a:xfrm>
-            <a:off x="6300216" y="10232136"/>
+            <a:off x="6300216" y="10158984"/>
             <a:ext cx="548640" cy="219456"/>
           </a:xfrm>
           <a:prstGeom prst="rect">
@@ -3389,8 +3389,8 @@
         </p:nvSpPr>
         <p:spPr>
           <a:xfrm>
-            <a:off x="713232" y="2107234"/>
-            <a:ext cx="2967228" cy="409194"/>
+            <a:off x="725932" y="2193086"/>
+            <a:ext cx="2941828" cy="555244"/>
           </a:xfrm>
           <a:prstGeom prst="rect">
             <a:avLst/>
@@ -3414,16 +3414,20 @@
         </p:nvSpPr>
         <p:spPr>
           <a:xfrm>
-            <a:off x="932688" y="2302687"/>
-            <a:ext cx="68580" cy="91440"/>
-          </a:xfrm>
-          <a:prstGeom prst="line">
-            <a:avLst/>
-          </a:prstGeom>
-          <a:noFill/>
-          <a:ln w="38100">
+            <a:off x="850392" y="2333548"/>
+            <a:ext cx="274320" cy="274320"/>
+          </a:xfrm>
+          <a:prstGeom prst="roundRect">
+            <a:avLst>
+              <a:gd name="adj" fmla="val 23333"/>
+            </a:avLst>
+          </a:prstGeom>
+          <a:solidFill>
+            <a:srgbClr val="18D7DF"/>
+          </a:solidFill>
+          <a:ln w="19050">
             <a:solidFill>
-              <a:srgbClr val="18D7DF"/>
+              <a:srgbClr val="000000"/>
             </a:solidFill>
             <a:prstDash val="solid"/>
           </a:ln>
@@ -3436,17 +3440,17 @@
           <p:nvPr/>
         </p:nvSpPr>
         <p:spPr>
-          <a:xfrm flipV="1">
-            <a:off x="1001268" y="2229535"/>
-            <a:ext cx="141732" cy="164592"/>
+          <a:xfrm>
+            <a:off x="918972" y="2466136"/>
+            <a:ext cx="50292" cy="64008"/>
           </a:xfrm>
           <a:prstGeom prst="line">
             <a:avLst/>
           </a:prstGeom>
           <a:noFill/>
-          <a:ln w="38100">
+          <a:ln w="28575">
             <a:solidFill>
-              <a:srgbClr val="18D7DF"/>
+              <a:srgbClr val="000000"/>
             </a:solidFill>
             <a:prstDash val="solid"/>
           </a:ln>
@@ -3454,14 +3458,37 @@
       </p:sp>
       <p:sp>
         <p:nvSpPr>
-          <p:cNvPr id="9" name="Text 6"/>
-          <p:cNvSpPr/>
-          <p:nvPr/>
-        </p:nvSpPr>
-        <p:spPr>
-          <a:xfrm>
-            <a:off x="1225296" y="2107234"/>
-            <a:ext cx="2327148" cy="409194"/>
+          <p:cNvPr id="9" name="Shape 6"/>
+          <p:cNvSpPr/>
+          <p:nvPr/>
+        </p:nvSpPr>
+        <p:spPr>
+          <a:xfrm flipV="1">
+            <a:off x="969264" y="2411272"/>
+            <a:ext cx="91440" cy="118872"/>
+          </a:xfrm>
+          <a:prstGeom prst="line">
+            <a:avLst/>
+          </a:prstGeom>
+          <a:noFill/>
+          <a:ln w="28575">
+            <a:solidFill>
+              <a:srgbClr val="000000"/>
+            </a:solidFill>
+            <a:prstDash val="solid"/>
+          </a:ln>
+        </p:spPr>
+      </p:sp>
+      <p:sp>
+        <p:nvSpPr>
+          <p:cNvPr id="10" name="Text 7"/>
+          <p:cNvSpPr/>
+          <p:nvPr/>
+        </p:nvSpPr>
+        <p:spPr>
+          <a:xfrm>
+            <a:off x="1225296" y="2180386"/>
+            <a:ext cx="2327148" cy="580644"/>
           </a:xfrm>
           <a:prstGeom prst="rect">
             <a:avLst/>
@@ -3496,14 +3523,14 @@
       </p:sp>
       <p:sp>
         <p:nvSpPr>
-          <p:cNvPr id="10" name="Shape 7"/>
-          <p:cNvSpPr/>
-          <p:nvPr/>
-        </p:nvSpPr>
-        <p:spPr>
-          <a:xfrm>
-            <a:off x="3881628" y="2107234"/>
-            <a:ext cx="2967228" cy="409194"/>
+          <p:cNvPr id="11" name="Shape 8"/>
+          <p:cNvSpPr/>
+          <p:nvPr/>
+        </p:nvSpPr>
+        <p:spPr>
+          <a:xfrm>
+            <a:off x="3894328" y="2193086"/>
+            <a:ext cx="2941828" cy="555244"/>
           </a:xfrm>
           <a:prstGeom prst="rect">
             <a:avLst/>
@@ -3521,20 +3548,24 @@
       </p:sp>
       <p:sp>
         <p:nvSpPr>
-          <p:cNvPr id="11" name="Shape 8"/>
-          <p:cNvSpPr/>
-          <p:nvPr/>
-        </p:nvSpPr>
-        <p:spPr>
-          <a:xfrm>
-            <a:off x="4101084" y="2302687"/>
-            <a:ext cx="68580" cy="91440"/>
-          </a:xfrm>
-          <a:prstGeom prst="line">
-            <a:avLst/>
-          </a:prstGeom>
-          <a:noFill/>
-          <a:ln w="38100">
+          <p:cNvPr id="12" name="Shape 9"/>
+          <p:cNvSpPr/>
+          <p:nvPr/>
+        </p:nvSpPr>
+        <p:spPr>
+          <a:xfrm>
+            <a:off x="4018788" y="2333548"/>
+            <a:ext cx="274320" cy="274320"/>
+          </a:xfrm>
+          <a:prstGeom prst="roundRect">
+            <a:avLst>
+              <a:gd name="adj" fmla="val 23333"/>
+            </a:avLst>
+          </a:prstGeom>
+          <a:solidFill>
+            <a:srgbClr val="FFB3D1"/>
+          </a:solidFill>
+          <a:ln w="19050">
             <a:solidFill>
               <a:srgbClr val="000000"/>
             </a:solidFill>
@@ -3544,20 +3575,20 @@
       </p:sp>
       <p:sp>
         <p:nvSpPr>
-          <p:cNvPr id="12" name="Shape 9"/>
-          <p:cNvSpPr/>
-          <p:nvPr/>
-        </p:nvSpPr>
-        <p:spPr>
-          <a:xfrm flipV="1">
-            <a:off x="4169664" y="2229535"/>
-            <a:ext cx="141732" cy="164592"/>
+          <p:cNvPr id="13" name="Shape 10"/>
+          <p:cNvSpPr/>
+          <p:nvPr/>
+        </p:nvSpPr>
+        <p:spPr>
+          <a:xfrm>
+            <a:off x="4087368" y="2466136"/>
+            <a:ext cx="50292" cy="64008"/>
           </a:xfrm>
           <a:prstGeom prst="line">
             <a:avLst/>
           </a:prstGeom>
           <a:noFill/>
-          <a:ln w="38100">
+          <a:ln w="28575">
             <a:solidFill>
               <a:srgbClr val="000000"/>
             </a:solidFill>
@@ -3567,14 +3598,37 @@
       </p:sp>
       <p:sp>
         <p:nvSpPr>
-          <p:cNvPr id="13" name="Text 10"/>
-          <p:cNvSpPr/>
-          <p:nvPr/>
-        </p:nvSpPr>
-        <p:spPr>
-          <a:xfrm>
-            <a:off x="4393692" y="2107234"/>
-            <a:ext cx="2327148" cy="409194"/>
+          <p:cNvPr id="14" name="Shape 11"/>
+          <p:cNvSpPr/>
+          <p:nvPr/>
+        </p:nvSpPr>
+        <p:spPr>
+          <a:xfrm flipV="1">
+            <a:off x="4137660" y="2411272"/>
+            <a:ext cx="91440" cy="118872"/>
+          </a:xfrm>
+          <a:prstGeom prst="line">
+            <a:avLst/>
+          </a:prstGeom>
+          <a:noFill/>
+          <a:ln w="28575">
+            <a:solidFill>
+              <a:srgbClr val="000000"/>
+            </a:solidFill>
+            <a:prstDash val="solid"/>
+          </a:ln>
+        </p:spPr>
+      </p:sp>
+      <p:sp>
+        <p:nvSpPr>
+          <p:cNvPr id="15" name="Text 12"/>
+          <p:cNvSpPr/>
+          <p:nvPr/>
+        </p:nvSpPr>
+        <p:spPr>
+          <a:xfrm>
+            <a:off x="4393692" y="2180386"/>
+            <a:ext cx="2327148" cy="580644"/>
           </a:xfrm>
           <a:prstGeom prst="rect">
             <a:avLst/>
@@ -3609,14 +3663,14 @@
       </p:sp>
       <p:sp>
         <p:nvSpPr>
-          <p:cNvPr id="14" name="Shape 11"/>
-          <p:cNvSpPr/>
-          <p:nvPr/>
-        </p:nvSpPr>
-        <p:spPr>
-          <a:xfrm>
-            <a:off x="713232" y="2617012"/>
-            <a:ext cx="2967228" cy="580644"/>
+          <p:cNvPr id="16" name="Shape 13"/>
+          <p:cNvSpPr/>
+          <p:nvPr/>
+        </p:nvSpPr>
+        <p:spPr>
+          <a:xfrm>
+            <a:off x="725932" y="2874314"/>
+            <a:ext cx="2941828" cy="555244"/>
           </a:xfrm>
           <a:prstGeom prst="rect">
             <a:avLst/>
@@ -3634,22 +3688,26 @@
       </p:sp>
       <p:sp>
         <p:nvSpPr>
-          <p:cNvPr id="15" name="Shape 12"/>
-          <p:cNvSpPr/>
-          <p:nvPr/>
-        </p:nvSpPr>
-        <p:spPr>
-          <a:xfrm>
-            <a:off x="932688" y="2898190"/>
-            <a:ext cx="68580" cy="91440"/>
-          </a:xfrm>
-          <a:prstGeom prst="line">
-            <a:avLst/>
-          </a:prstGeom>
-          <a:noFill/>
-          <a:ln w="38100">
+          <p:cNvPr id="17" name="Shape 14"/>
+          <p:cNvSpPr/>
+          <p:nvPr/>
+        </p:nvSpPr>
+        <p:spPr>
+          <a:xfrm>
+            <a:off x="850392" y="3014776"/>
+            <a:ext cx="274320" cy="274320"/>
+          </a:xfrm>
+          <a:prstGeom prst="roundRect">
+            <a:avLst>
+              <a:gd name="adj" fmla="val 23333"/>
+            </a:avLst>
+          </a:prstGeom>
+          <a:solidFill>
+            <a:srgbClr val="FFB3D1"/>
+          </a:solidFill>
+          <a:ln w="19050">
             <a:solidFill>
-              <a:srgbClr val="F6C707"/>
+              <a:srgbClr val="000000"/>
             </a:solidFill>
             <a:prstDash val="solid"/>
           </a:ln>
@@ -3657,22 +3715,22 @@
       </p:sp>
       <p:sp>
         <p:nvSpPr>
-          <p:cNvPr id="16" name="Shape 13"/>
-          <p:cNvSpPr/>
-          <p:nvPr/>
-        </p:nvSpPr>
-        <p:spPr>
-          <a:xfrm flipV="1">
-            <a:off x="1001268" y="2825038"/>
-            <a:ext cx="141732" cy="164592"/>
+          <p:cNvPr id="18" name="Shape 15"/>
+          <p:cNvSpPr/>
+          <p:nvPr/>
+        </p:nvSpPr>
+        <p:spPr>
+          <a:xfrm>
+            <a:off x="918972" y="3147364"/>
+            <a:ext cx="50292" cy="64008"/>
           </a:xfrm>
           <a:prstGeom prst="line">
             <a:avLst/>
           </a:prstGeom>
           <a:noFill/>
-          <a:ln w="38100">
+          <a:ln w="28575">
             <a:solidFill>
-              <a:srgbClr val="F6C707"/>
+              <a:srgbClr val="000000"/>
             </a:solidFill>
             <a:prstDash val="solid"/>
           </a:ln>
@@ -3680,13 +3738,36 @@
       </p:sp>
       <p:sp>
         <p:nvSpPr>
-          <p:cNvPr id="17" name="Text 14"/>
-          <p:cNvSpPr/>
-          <p:nvPr/>
-        </p:nvSpPr>
-        <p:spPr>
-          <a:xfrm>
-            <a:off x="1225296" y="2617012"/>
+          <p:cNvPr id="19" name="Shape 16"/>
+          <p:cNvSpPr/>
+          <p:nvPr/>
+        </p:nvSpPr>
+        <p:spPr>
+          <a:xfrm flipV="1">
+            <a:off x="969264" y="3092500"/>
+            <a:ext cx="91440" cy="118872"/>
+          </a:xfrm>
+          <a:prstGeom prst="line">
+            <a:avLst/>
+          </a:prstGeom>
+          <a:noFill/>
+          <a:ln w="28575">
+            <a:solidFill>
+              <a:srgbClr val="000000"/>
+            </a:solidFill>
+            <a:prstDash val="solid"/>
+          </a:ln>
+        </p:spPr>
+      </p:sp>
+      <p:sp>
+        <p:nvSpPr>
+          <p:cNvPr id="20" name="Text 17"/>
+          <p:cNvSpPr/>
+          <p:nvPr/>
+        </p:nvSpPr>
+        <p:spPr>
+          <a:xfrm>
+            <a:off x="1225296" y="2861614"/>
             <a:ext cx="2327148" cy="580644"/>
           </a:xfrm>
           <a:prstGeom prst="rect">
@@ -3722,14 +3803,14 @@
       </p:sp>
       <p:sp>
         <p:nvSpPr>
-          <p:cNvPr id="18" name="Shape 15"/>
-          <p:cNvSpPr/>
-          <p:nvPr/>
-        </p:nvSpPr>
-        <p:spPr>
-          <a:xfrm>
-            <a:off x="3881628" y="2617012"/>
-            <a:ext cx="2967228" cy="580644"/>
+          <p:cNvPr id="21" name="Shape 18"/>
+          <p:cNvSpPr/>
+          <p:nvPr/>
+        </p:nvSpPr>
+        <p:spPr>
+          <a:xfrm>
+            <a:off x="3894328" y="2874314"/>
+            <a:ext cx="2941828" cy="555244"/>
           </a:xfrm>
           <a:prstGeom prst="rect">
             <a:avLst/>
@@ -3747,22 +3828,26 @@
       </p:sp>
       <p:sp>
         <p:nvSpPr>
-          <p:cNvPr id="19" name="Shape 16"/>
-          <p:cNvSpPr/>
-          <p:nvPr/>
-        </p:nvSpPr>
-        <p:spPr>
-          <a:xfrm>
-            <a:off x="4101084" y="2898190"/>
-            <a:ext cx="68580" cy="91440"/>
-          </a:xfrm>
-          <a:prstGeom prst="line">
-            <a:avLst/>
-          </a:prstGeom>
-          <a:noFill/>
-          <a:ln w="38100">
+          <p:cNvPr id="22" name="Shape 19"/>
+          <p:cNvSpPr/>
+          <p:nvPr/>
+        </p:nvSpPr>
+        <p:spPr>
+          <a:xfrm>
+            <a:off x="4018788" y="3014776"/>
+            <a:ext cx="274320" cy="274320"/>
+          </a:xfrm>
+          <a:prstGeom prst="roundRect">
+            <a:avLst>
+              <a:gd name="adj" fmla="val 23333"/>
+            </a:avLst>
+          </a:prstGeom>
+          <a:solidFill>
+            <a:srgbClr val="F6C707"/>
+          </a:solidFill>
+          <a:ln w="19050">
             <a:solidFill>
-              <a:srgbClr val="935BBC"/>
+              <a:srgbClr val="000000"/>
             </a:solidFill>
             <a:prstDash val="solid"/>
           </a:ln>
@@ -3770,22 +3855,22 @@
       </p:sp>
       <p:sp>
         <p:nvSpPr>
-          <p:cNvPr id="20" name="Shape 17"/>
-          <p:cNvSpPr/>
-          <p:nvPr/>
-        </p:nvSpPr>
-        <p:spPr>
-          <a:xfrm flipV="1">
-            <a:off x="4169664" y="2825038"/>
-            <a:ext cx="141732" cy="164592"/>
+          <p:cNvPr id="23" name="Shape 20"/>
+          <p:cNvSpPr/>
+          <p:nvPr/>
+        </p:nvSpPr>
+        <p:spPr>
+          <a:xfrm>
+            <a:off x="4087368" y="3147364"/>
+            <a:ext cx="50292" cy="64008"/>
           </a:xfrm>
           <a:prstGeom prst="line">
             <a:avLst/>
           </a:prstGeom>
           <a:noFill/>
-          <a:ln w="38100">
+          <a:ln w="28575">
             <a:solidFill>
-              <a:srgbClr val="935BBC"/>
+              <a:srgbClr val="000000"/>
             </a:solidFill>
             <a:prstDash val="solid"/>
           </a:ln>
@@ -3793,13 +3878,36 @@
       </p:sp>
       <p:sp>
         <p:nvSpPr>
-          <p:cNvPr id="21" name="Text 18"/>
-          <p:cNvSpPr/>
-          <p:nvPr/>
-        </p:nvSpPr>
-        <p:spPr>
-          <a:xfrm>
-            <a:off x="4393692" y="2617012"/>
+          <p:cNvPr id="24" name="Shape 21"/>
+          <p:cNvSpPr/>
+          <p:nvPr/>
+        </p:nvSpPr>
+        <p:spPr>
+          <a:xfrm flipV="1">
+            <a:off x="4137660" y="3092500"/>
+            <a:ext cx="91440" cy="118872"/>
+          </a:xfrm>
+          <a:prstGeom prst="line">
+            <a:avLst/>
+          </a:prstGeom>
+          <a:noFill/>
+          <a:ln w="28575">
+            <a:solidFill>
+              <a:srgbClr val="000000"/>
+            </a:solidFill>
+            <a:prstDash val="solid"/>
+          </a:ln>
+        </p:spPr>
+      </p:sp>
+      <p:sp>
+        <p:nvSpPr>
+          <p:cNvPr id="25" name="Text 22"/>
+          <p:cNvSpPr/>
+          <p:nvPr/>
+        </p:nvSpPr>
+        <p:spPr>
+          <a:xfrm>
+            <a:off x="4393692" y="2861614"/>
             <a:ext cx="2327148" cy="580644"/>
           </a:xfrm>
           <a:prstGeom prst="rect">
@@ -3835,14 +3943,14 @@
       </p:sp>
       <p:sp>
         <p:nvSpPr>
-          <p:cNvPr id="22" name="Shape 19"/>
-          <p:cNvSpPr/>
-          <p:nvPr/>
-        </p:nvSpPr>
-        <p:spPr>
-          <a:xfrm>
-            <a:off x="713232" y="3298240"/>
-            <a:ext cx="2967228" cy="580644"/>
+          <p:cNvPr id="26" name="Shape 23"/>
+          <p:cNvSpPr/>
+          <p:nvPr/>
+        </p:nvSpPr>
+        <p:spPr>
+          <a:xfrm>
+            <a:off x="725932" y="3555542"/>
+            <a:ext cx="2941828" cy="555244"/>
           </a:xfrm>
           <a:prstGeom prst="rect">
             <a:avLst/>
@@ -3860,22 +3968,26 @@
       </p:sp>
       <p:sp>
         <p:nvSpPr>
-          <p:cNvPr id="23" name="Shape 20"/>
-          <p:cNvSpPr/>
-          <p:nvPr/>
-        </p:nvSpPr>
-        <p:spPr>
-          <a:xfrm>
-            <a:off x="932688" y="3579418"/>
-            <a:ext cx="68580" cy="91440"/>
-          </a:xfrm>
-          <a:prstGeom prst="line">
-            <a:avLst/>
-          </a:prstGeom>
-          <a:noFill/>
-          <a:ln w="38100">
+          <p:cNvPr id="27" name="Shape 24"/>
+          <p:cNvSpPr/>
+          <p:nvPr/>
+        </p:nvSpPr>
+        <p:spPr>
+          <a:xfrm>
+            <a:off x="850392" y="3696004"/>
+            <a:ext cx="274320" cy="274320"/>
+          </a:xfrm>
+          <a:prstGeom prst="roundRect">
+            <a:avLst>
+              <a:gd name="adj" fmla="val 23333"/>
+            </a:avLst>
+          </a:prstGeom>
+          <a:solidFill>
+            <a:srgbClr val="F6C707"/>
+          </a:solidFill>
+          <a:ln w="19050">
             <a:solidFill>
-              <a:srgbClr val="18D7DF"/>
+              <a:srgbClr val="000000"/>
             </a:solidFill>
             <a:prstDash val="solid"/>
           </a:ln>
@@ -3883,22 +3995,22 @@
       </p:sp>
       <p:sp>
         <p:nvSpPr>
-          <p:cNvPr id="24" name="Shape 21"/>
-          <p:cNvSpPr/>
-          <p:nvPr/>
-        </p:nvSpPr>
-        <p:spPr>
-          <a:xfrm flipV="1">
-            <a:off x="1001268" y="3506266"/>
-            <a:ext cx="141732" cy="164592"/>
+          <p:cNvPr id="28" name="Shape 25"/>
+          <p:cNvSpPr/>
+          <p:nvPr/>
+        </p:nvSpPr>
+        <p:spPr>
+          <a:xfrm>
+            <a:off x="918972" y="3828592"/>
+            <a:ext cx="50292" cy="64008"/>
           </a:xfrm>
           <a:prstGeom prst="line">
             <a:avLst/>
           </a:prstGeom>
           <a:noFill/>
-          <a:ln w="38100">
+          <a:ln w="28575">
             <a:solidFill>
-              <a:srgbClr val="18D7DF"/>
+              <a:srgbClr val="000000"/>
             </a:solidFill>
             <a:prstDash val="solid"/>
           </a:ln>
@@ -3906,13 +4018,36 @@
       </p:sp>
       <p:sp>
         <p:nvSpPr>
-          <p:cNvPr id="25" name="Text 22"/>
-          <p:cNvSpPr/>
-          <p:nvPr/>
-        </p:nvSpPr>
-        <p:spPr>
-          <a:xfrm>
-            <a:off x="1225296" y="3298240"/>
+          <p:cNvPr id="29" name="Shape 26"/>
+          <p:cNvSpPr/>
+          <p:nvPr/>
+        </p:nvSpPr>
+        <p:spPr>
+          <a:xfrm flipV="1">
+            <a:off x="969264" y="3773728"/>
+            <a:ext cx="91440" cy="118872"/>
+          </a:xfrm>
+          <a:prstGeom prst="line">
+            <a:avLst/>
+          </a:prstGeom>
+          <a:noFill/>
+          <a:ln w="28575">
+            <a:solidFill>
+              <a:srgbClr val="000000"/>
+            </a:solidFill>
+            <a:prstDash val="solid"/>
+          </a:ln>
+        </p:spPr>
+      </p:sp>
+      <p:sp>
+        <p:nvSpPr>
+          <p:cNvPr id="30" name="Text 27"/>
+          <p:cNvSpPr/>
+          <p:nvPr/>
+        </p:nvSpPr>
+        <p:spPr>
+          <a:xfrm>
+            <a:off x="1225296" y="3542842"/>
             <a:ext cx="2327148" cy="580644"/>
           </a:xfrm>
           <a:prstGeom prst="rect">
@@ -3948,14 +4083,14 @@
       </p:sp>
       <p:sp>
         <p:nvSpPr>
-          <p:cNvPr id="26" name="Shape 23"/>
-          <p:cNvSpPr/>
-          <p:nvPr/>
-        </p:nvSpPr>
-        <p:spPr>
-          <a:xfrm>
-            <a:off x="3881628" y="3298240"/>
-            <a:ext cx="2967228" cy="580644"/>
+          <p:cNvPr id="31" name="Shape 28"/>
+          <p:cNvSpPr/>
+          <p:nvPr/>
+        </p:nvSpPr>
+        <p:spPr>
+          <a:xfrm>
+            <a:off x="3894328" y="3555542"/>
+            <a:ext cx="2941828" cy="555244"/>
           </a:xfrm>
           <a:prstGeom prst="rect">
             <a:avLst/>
@@ -3973,20 +4108,24 @@
       </p:sp>
       <p:sp>
         <p:nvSpPr>
-          <p:cNvPr id="27" name="Shape 24"/>
-          <p:cNvSpPr/>
-          <p:nvPr/>
-        </p:nvSpPr>
-        <p:spPr>
-          <a:xfrm>
-            <a:off x="4101084" y="3579418"/>
-            <a:ext cx="68580" cy="91440"/>
-          </a:xfrm>
-          <a:prstGeom prst="line">
-            <a:avLst/>
-          </a:prstGeom>
-          <a:noFill/>
-          <a:ln w="38100">
+          <p:cNvPr id="32" name="Shape 29"/>
+          <p:cNvSpPr/>
+          <p:nvPr/>
+        </p:nvSpPr>
+        <p:spPr>
+          <a:xfrm>
+            <a:off x="4018788" y="3696004"/>
+            <a:ext cx="274320" cy="274320"/>
+          </a:xfrm>
+          <a:prstGeom prst="roundRect">
+            <a:avLst>
+              <a:gd name="adj" fmla="val 23333"/>
+            </a:avLst>
+          </a:prstGeom>
+          <a:solidFill>
+            <a:srgbClr val="935BBC"/>
+          </a:solidFill>
+          <a:ln w="19050">
             <a:solidFill>
               <a:srgbClr val="000000"/>
             </a:solidFill>
@@ -3996,20 +4135,20 @@
       </p:sp>
       <p:sp>
         <p:nvSpPr>
-          <p:cNvPr id="28" name="Shape 25"/>
-          <p:cNvSpPr/>
-          <p:nvPr/>
-        </p:nvSpPr>
-        <p:spPr>
-          <a:xfrm flipV="1">
-            <a:off x="4169664" y="3506266"/>
-            <a:ext cx="141732" cy="164592"/>
+          <p:cNvPr id="33" name="Shape 30"/>
+          <p:cNvSpPr/>
+          <p:nvPr/>
+        </p:nvSpPr>
+        <p:spPr>
+          <a:xfrm>
+            <a:off x="4087368" y="3828592"/>
+            <a:ext cx="50292" cy="64008"/>
           </a:xfrm>
           <a:prstGeom prst="line">
             <a:avLst/>
           </a:prstGeom>
           <a:noFill/>
-          <a:ln w="38100">
+          <a:ln w="28575">
             <a:solidFill>
               <a:srgbClr val="000000"/>
             </a:solidFill>
@@ -4019,13 +4158,36 @@
       </p:sp>
       <p:sp>
         <p:nvSpPr>
-          <p:cNvPr id="29" name="Text 26"/>
-          <p:cNvSpPr/>
-          <p:nvPr/>
-        </p:nvSpPr>
-        <p:spPr>
-          <a:xfrm>
-            <a:off x="4393692" y="3298240"/>
+          <p:cNvPr id="34" name="Shape 31"/>
+          <p:cNvSpPr/>
+          <p:nvPr/>
+        </p:nvSpPr>
+        <p:spPr>
+          <a:xfrm flipV="1">
+            <a:off x="4137660" y="3773728"/>
+            <a:ext cx="91440" cy="118872"/>
+          </a:xfrm>
+          <a:prstGeom prst="line">
+            <a:avLst/>
+          </a:prstGeom>
+          <a:noFill/>
+          <a:ln w="28575">
+            <a:solidFill>
+              <a:srgbClr val="000000"/>
+            </a:solidFill>
+            <a:prstDash val="solid"/>
+          </a:ln>
+        </p:spPr>
+      </p:sp>
+      <p:sp>
+        <p:nvSpPr>
+          <p:cNvPr id="35" name="Text 32"/>
+          <p:cNvSpPr/>
+          <p:nvPr/>
+        </p:nvSpPr>
+        <p:spPr>
+          <a:xfrm>
+            <a:off x="4393692" y="3542842"/>
             <a:ext cx="2327148" cy="580644"/>
           </a:xfrm>
           <a:prstGeom prst="rect">
@@ -4061,14 +4223,14 @@
       </p:sp>
       <p:sp>
         <p:nvSpPr>
-          <p:cNvPr id="30" name="Shape 27"/>
-          <p:cNvSpPr/>
-          <p:nvPr/>
-        </p:nvSpPr>
-        <p:spPr>
-          <a:xfrm>
-            <a:off x="713232" y="3979468"/>
-            <a:ext cx="2967228" cy="752094"/>
+          <p:cNvPr id="36" name="Shape 33"/>
+          <p:cNvSpPr/>
+          <p:nvPr/>
+        </p:nvSpPr>
+        <p:spPr>
+          <a:xfrm>
+            <a:off x="725932" y="4236770"/>
+            <a:ext cx="2941828" cy="555244"/>
           </a:xfrm>
           <a:prstGeom prst="rect">
             <a:avLst/>
@@ -4086,22 +4248,26 @@
       </p:sp>
       <p:sp>
         <p:nvSpPr>
-          <p:cNvPr id="31" name="Shape 28"/>
-          <p:cNvSpPr/>
-          <p:nvPr/>
-        </p:nvSpPr>
-        <p:spPr>
-          <a:xfrm>
-            <a:off x="932688" y="4346371"/>
-            <a:ext cx="68580" cy="91440"/>
-          </a:xfrm>
-          <a:prstGeom prst="line">
-            <a:avLst/>
-          </a:prstGeom>
-          <a:noFill/>
-          <a:ln w="38100">
+          <p:cNvPr id="37" name="Shape 34"/>
+          <p:cNvSpPr/>
+          <p:nvPr/>
+        </p:nvSpPr>
+        <p:spPr>
+          <a:xfrm>
+            <a:off x="850392" y="4377232"/>
+            <a:ext cx="274320" cy="274320"/>
+          </a:xfrm>
+          <a:prstGeom prst="roundRect">
+            <a:avLst>
+              <a:gd name="adj" fmla="val 23333"/>
+            </a:avLst>
+          </a:prstGeom>
+          <a:solidFill>
+            <a:srgbClr val="935BBC"/>
+          </a:solidFill>
+          <a:ln w="19050">
             <a:solidFill>
-              <a:srgbClr val="F6C707"/>
+              <a:srgbClr val="000000"/>
             </a:solidFill>
             <a:prstDash val="solid"/>
           </a:ln>
@@ -4109,22 +4275,22 @@
       </p:sp>
       <p:sp>
         <p:nvSpPr>
-          <p:cNvPr id="32" name="Shape 29"/>
-          <p:cNvSpPr/>
-          <p:nvPr/>
-        </p:nvSpPr>
-        <p:spPr>
-          <a:xfrm flipV="1">
-            <a:off x="1001268" y="4273219"/>
-            <a:ext cx="141732" cy="164592"/>
+          <p:cNvPr id="38" name="Shape 35"/>
+          <p:cNvSpPr/>
+          <p:nvPr/>
+        </p:nvSpPr>
+        <p:spPr>
+          <a:xfrm>
+            <a:off x="918972" y="4509820"/>
+            <a:ext cx="50292" cy="64008"/>
           </a:xfrm>
           <a:prstGeom prst="line">
             <a:avLst/>
           </a:prstGeom>
           <a:noFill/>
-          <a:ln w="38100">
+          <a:ln w="28575">
             <a:solidFill>
-              <a:srgbClr val="F6C707"/>
+              <a:srgbClr val="000000"/>
             </a:solidFill>
             <a:prstDash val="solid"/>
           </a:ln>
@@ -4132,14 +4298,37 @@
       </p:sp>
       <p:sp>
         <p:nvSpPr>
-          <p:cNvPr id="33" name="Text 30"/>
-          <p:cNvSpPr/>
-          <p:nvPr/>
-        </p:nvSpPr>
-        <p:spPr>
-          <a:xfrm>
-            <a:off x="1225296" y="3979468"/>
-            <a:ext cx="2327148" cy="752094"/>
+          <p:cNvPr id="39" name="Shape 36"/>
+          <p:cNvSpPr/>
+          <p:nvPr/>
+        </p:nvSpPr>
+        <p:spPr>
+          <a:xfrm flipV="1">
+            <a:off x="969264" y="4454956"/>
+            <a:ext cx="91440" cy="118872"/>
+          </a:xfrm>
+          <a:prstGeom prst="line">
+            <a:avLst/>
+          </a:prstGeom>
+          <a:noFill/>
+          <a:ln w="28575">
+            <a:solidFill>
+              <a:srgbClr val="000000"/>
+            </a:solidFill>
+            <a:prstDash val="solid"/>
+          </a:ln>
+        </p:spPr>
+      </p:sp>
+      <p:sp>
+        <p:nvSpPr>
+          <p:cNvPr id="40" name="Text 37"/>
+          <p:cNvSpPr/>
+          <p:nvPr/>
+        </p:nvSpPr>
+        <p:spPr>
+          <a:xfrm>
+            <a:off x="1225296" y="4224070"/>
+            <a:ext cx="2327148" cy="580644"/>
           </a:xfrm>
           <a:prstGeom prst="rect">
             <a:avLst/>
@@ -4174,14 +4363,14 @@
       </p:sp>
       <p:sp>
         <p:nvSpPr>
-          <p:cNvPr id="34" name="Shape 31"/>
-          <p:cNvSpPr/>
-          <p:nvPr/>
-        </p:nvSpPr>
-        <p:spPr>
-          <a:xfrm>
-            <a:off x="3881628" y="3979468"/>
-            <a:ext cx="2967228" cy="752094"/>
+          <p:cNvPr id="41" name="Shape 38"/>
+          <p:cNvSpPr/>
+          <p:nvPr/>
+        </p:nvSpPr>
+        <p:spPr>
+          <a:xfrm>
+            <a:off x="3894328" y="4236770"/>
+            <a:ext cx="2941828" cy="555244"/>
           </a:xfrm>
           <a:prstGeom prst="rect">
             <a:avLst/>
@@ -4199,22 +4388,26 @@
       </p:sp>
       <p:sp>
         <p:nvSpPr>
-          <p:cNvPr id="35" name="Shape 32"/>
-          <p:cNvSpPr/>
-          <p:nvPr/>
-        </p:nvSpPr>
-        <p:spPr>
-          <a:xfrm>
-            <a:off x="4101084" y="4346371"/>
-            <a:ext cx="68580" cy="91440"/>
-          </a:xfrm>
-          <a:prstGeom prst="line">
-            <a:avLst/>
-          </a:prstGeom>
-          <a:noFill/>
-          <a:ln w="38100">
+          <p:cNvPr id="42" name="Shape 39"/>
+          <p:cNvSpPr/>
+          <p:nvPr/>
+        </p:nvSpPr>
+        <p:spPr>
+          <a:xfrm>
+            <a:off x="4018788" y="4377232"/>
+            <a:ext cx="274320" cy="274320"/>
+          </a:xfrm>
+          <a:prstGeom prst="roundRect">
+            <a:avLst>
+              <a:gd name="adj" fmla="val 23333"/>
+            </a:avLst>
+          </a:prstGeom>
+          <a:solidFill>
+            <a:srgbClr val="18D7DF"/>
+          </a:solidFill>
+          <a:ln w="19050">
             <a:solidFill>
-              <a:srgbClr val="935BBC"/>
+              <a:srgbClr val="000000"/>
             </a:solidFill>
             <a:prstDash val="solid"/>
           </a:ln>
@@ -4222,22 +4415,22 @@
       </p:sp>
       <p:sp>
         <p:nvSpPr>
-          <p:cNvPr id="36" name="Shape 33"/>
-          <p:cNvSpPr/>
-          <p:nvPr/>
-        </p:nvSpPr>
-        <p:spPr>
-          <a:xfrm flipV="1">
-            <a:off x="4169664" y="4273219"/>
-            <a:ext cx="141732" cy="164592"/>
+          <p:cNvPr id="43" name="Shape 40"/>
+          <p:cNvSpPr/>
+          <p:nvPr/>
+        </p:nvSpPr>
+        <p:spPr>
+          <a:xfrm>
+            <a:off x="4087368" y="4509820"/>
+            <a:ext cx="50292" cy="64008"/>
           </a:xfrm>
           <a:prstGeom prst="line">
             <a:avLst/>
           </a:prstGeom>
           <a:noFill/>
-          <a:ln w="38100">
+          <a:ln w="28575">
             <a:solidFill>
-              <a:srgbClr val="935BBC"/>
+              <a:srgbClr val="000000"/>
             </a:solidFill>
             <a:prstDash val="solid"/>
           </a:ln>
@@ -4245,14 +4438,37 @@
       </p:sp>
       <p:sp>
         <p:nvSpPr>
-          <p:cNvPr id="37" name="Text 34"/>
-          <p:cNvSpPr/>
-          <p:nvPr/>
-        </p:nvSpPr>
-        <p:spPr>
-          <a:xfrm>
-            <a:off x="4393692" y="3979468"/>
-            <a:ext cx="2327148" cy="752094"/>
+          <p:cNvPr id="44" name="Shape 41"/>
+          <p:cNvSpPr/>
+          <p:nvPr/>
+        </p:nvSpPr>
+        <p:spPr>
+          <a:xfrm flipV="1">
+            <a:off x="4137660" y="4454956"/>
+            <a:ext cx="91440" cy="118872"/>
+          </a:xfrm>
+          <a:prstGeom prst="line">
+            <a:avLst/>
+          </a:prstGeom>
+          <a:noFill/>
+          <a:ln w="28575">
+            <a:solidFill>
+              <a:srgbClr val="000000"/>
+            </a:solidFill>
+            <a:prstDash val="solid"/>
+          </a:ln>
+        </p:spPr>
+      </p:sp>
+      <p:sp>
+        <p:nvSpPr>
+          <p:cNvPr id="45" name="Text 42"/>
+          <p:cNvSpPr/>
+          <p:nvPr/>
+        </p:nvSpPr>
+        <p:spPr>
+          <a:xfrm>
+            <a:off x="4393692" y="4224070"/>
+            <a:ext cx="2327148" cy="580644"/>
           </a:xfrm>
           <a:prstGeom prst="rect">
             <a:avLst/>
@@ -4287,13 +4503,13 @@
       </p:sp>
       <p:sp>
         <p:nvSpPr>
-          <p:cNvPr id="38" name="Shape 35"/>
-          <p:cNvSpPr/>
-          <p:nvPr/>
-        </p:nvSpPr>
-        <p:spPr>
-          <a:xfrm>
-            <a:off x="713232" y="5075191"/>
+          <p:cNvPr id="46" name="Shape 43"/>
+          <p:cNvSpPr/>
+          <p:nvPr/>
+        </p:nvSpPr>
+        <p:spPr>
+          <a:xfrm>
+            <a:off x="713232" y="5125384"/>
             <a:ext cx="6135624" cy="983587"/>
           </a:xfrm>
           <a:prstGeom prst="roundRect">
@@ -4309,23 +4525,23 @@
       </p:sp>
       <p:sp>
         <p:nvSpPr>
-          <p:cNvPr id="39" name="Text 36"/>
-          <p:cNvSpPr/>
-          <p:nvPr/>
-        </p:nvSpPr>
-        <p:spPr>
-          <a:xfrm>
-            <a:off x="1042416" y="5276359"/>
-            <a:ext cx="5477256" cy="617827"/>
-          </a:xfrm>
-          <a:prstGeom prst="rect">
-            <a:avLst/>
-          </a:prstGeom>
-          <a:noFill/>
-          <a:ln/>
-        </p:spPr>
-        <p:txBody>
-          <a:bodyPr wrap="square" lIns="0" tIns="0" rIns="0" bIns="0" rtlCol="0" anchor="t"/>
+          <p:cNvPr id="47" name="Text 44"/>
+          <p:cNvSpPr/>
+          <p:nvPr/>
+        </p:nvSpPr>
+        <p:spPr>
+          <a:xfrm>
+            <a:off x="1042416" y="5125384"/>
+            <a:ext cx="5477256" cy="983587"/>
+          </a:xfrm>
+          <a:prstGeom prst="rect">
+            <a:avLst/>
+          </a:prstGeom>
+          <a:noFill/>
+          <a:ln/>
+        </p:spPr>
+        <p:txBody>
+          <a:bodyPr wrap="square" lIns="0" tIns="0" rIns="0" bIns="0" rtlCol="0" anchor="ctr"/>
           <a:lstStyle/>
           <a:p>
             <a:pPr indent="0" marL="0">
@@ -4343,21 +4559,41 @@
                 <a:ea typeface="Anton" pitchFamily="34" charset="-122"/>
                 <a:cs typeface="Anton" pitchFamily="34" charset="-120"/>
               </a:rPr>
-              <a:t>ACREDITAMOS QUE AS MELHORES PARCERIAS SÃO CONSTRUÍDAS EM CONJUNTO.</a:t>
+              <a:t>ACREDITAMOS QUE AS MELHORES PARCERIAS</a:t>
             </a:r>
             <a:endParaRPr lang="en-US" sz="1550" dirty="0"/>
           </a:p>
-        </p:txBody>
-      </p:sp>
-      <p:sp>
-        <p:nvSpPr>
-          <p:cNvPr id="40" name="Shape 37"/>
+          <a:p>
+            <a:pPr indent="0" marL="0">
+              <a:lnSpc>
+                <a:spcPts val="2000"/>
+              </a:lnSpc>
+              <a:buNone/>
+            </a:pPr>
+            <a:r>
+              <a:rPr lang="en-US" sz="1550" dirty="0">
+                <a:solidFill>
+                  <a:srgbClr val="FFFFFF"/>
+                </a:solidFill>
+                <a:latin typeface="Anton" pitchFamily="34" charset="0"/>
+                <a:ea typeface="Anton" pitchFamily="34" charset="-122"/>
+                <a:cs typeface="Anton" pitchFamily="34" charset="-120"/>
+              </a:rPr>
+              <a:t>SÃO CONSTRUÍDAS EM CONJUNTO.</a:t>
+            </a:r>
+            <a:endParaRPr lang="en-US" sz="1550" dirty="0"/>
+          </a:p>
+        </p:txBody>
+      </p:sp>
+      <p:sp>
+        <p:nvSpPr>
+          <p:cNvPr id="48" name="Shape 45"/>
           <p:cNvSpPr/>
           <p:nvPr/>
         </p:nvSpPr>
         <p:spPr>
           <a:xfrm rot="10800000">
-            <a:off x="6245352" y="6049634"/>
+            <a:off x="6245352" y="6099828"/>
             <a:ext cx="237744" cy="182880"/>
           </a:xfrm>
           <a:prstGeom prst="triangle">
@@ -4371,13 +4607,13 @@
       </p:sp>
       <p:sp>
         <p:nvSpPr>
-          <p:cNvPr id="41" name="Text 38"/>
-          <p:cNvSpPr/>
-          <p:nvPr/>
-        </p:nvSpPr>
-        <p:spPr>
-          <a:xfrm>
-            <a:off x="713232" y="6423884"/>
+          <p:cNvPr id="49" name="Text 46"/>
+          <p:cNvSpPr/>
+          <p:nvPr/>
+        </p:nvSpPr>
+        <p:spPr>
+          <a:xfrm>
+            <a:off x="713232" y="6449684"/>
             <a:ext cx="6135624" cy="702713"/>
           </a:xfrm>
           <a:prstGeom prst="rect">
@@ -4413,13 +4649,13 @@
       </p:sp>
       <p:sp>
         <p:nvSpPr>
-          <p:cNvPr id="42" name="Text 39"/>
-          <p:cNvSpPr/>
-          <p:nvPr/>
-        </p:nvSpPr>
-        <p:spPr>
-          <a:xfrm>
-            <a:off x="713232" y="7265025"/>
+          <p:cNvPr id="50" name="Text 47"/>
+          <p:cNvSpPr/>
+          <p:nvPr/>
+        </p:nvSpPr>
+        <p:spPr>
+          <a:xfrm>
+            <a:off x="713232" y="7277911"/>
             <a:ext cx="6135624" cy="270814"/>
           </a:xfrm>
           <a:prstGeom prst="rect">
@@ -4455,13 +4691,13 @@
       </p:sp>
       <p:sp>
         <p:nvSpPr>
-          <p:cNvPr id="43" name="Text 40"/>
-          <p:cNvSpPr/>
-          <p:nvPr/>
-        </p:nvSpPr>
-        <p:spPr>
-          <a:xfrm>
-            <a:off x="713232" y="7674266"/>
+          <p:cNvPr id="51" name="Text 48"/>
+          <p:cNvSpPr/>
+          <p:nvPr/>
+        </p:nvSpPr>
+        <p:spPr>
+          <a:xfrm>
+            <a:off x="713232" y="7674238"/>
             <a:ext cx="6135624" cy="702713"/>
           </a:xfrm>
           <a:prstGeom prst="rect">
@@ -4497,13 +4733,13 @@
       </p:sp>
       <p:sp>
         <p:nvSpPr>
-          <p:cNvPr id="44" name="Shape 41"/>
-          <p:cNvSpPr/>
-          <p:nvPr/>
-        </p:nvSpPr>
-        <p:spPr>
-          <a:xfrm>
-            <a:off x="713232" y="8622790"/>
+          <p:cNvPr id="52" name="Shape 49"/>
+          <p:cNvSpPr/>
+          <p:nvPr/>
+        </p:nvSpPr>
+        <p:spPr>
+          <a:xfrm>
+            <a:off x="713232" y="8602673"/>
             <a:ext cx="6135624" cy="32004"/>
           </a:xfrm>
           <a:prstGeom prst="rect">
@@ -4517,13 +4753,13 @@
       </p:sp>
       <p:sp>
         <p:nvSpPr>
-          <p:cNvPr id="45" name="Text 42"/>
-          <p:cNvSpPr/>
-          <p:nvPr/>
-        </p:nvSpPr>
-        <p:spPr>
-          <a:xfrm>
-            <a:off x="713232" y="8897110"/>
+          <p:cNvPr id="53" name="Text 50"/>
+          <p:cNvSpPr/>
+          <p:nvPr/>
+        </p:nvSpPr>
+        <p:spPr>
+          <a:xfrm>
+            <a:off x="713232" y="8876993"/>
             <a:ext cx="6135624" cy="365760"/>
           </a:xfrm>
           <a:prstGeom prst="rect">
@@ -4559,13 +4795,13 @@
       </p:sp>
       <p:sp>
         <p:nvSpPr>
-          <p:cNvPr id="46" name="Text 43"/>
-          <p:cNvSpPr/>
-          <p:nvPr/>
-        </p:nvSpPr>
-        <p:spPr>
-          <a:xfrm>
-            <a:off x="713232" y="9299446"/>
+          <p:cNvPr id="54" name="Text 51"/>
+          <p:cNvSpPr/>
+          <p:nvPr/>
+        </p:nvSpPr>
+        <p:spPr>
+          <a:xfrm>
+            <a:off x="713232" y="9279329"/>
             <a:ext cx="6135624" cy="420624"/>
           </a:xfrm>
           <a:prstGeom prst="rect">
@@ -4621,13 +4857,13 @@
       </p:sp>
       <p:sp>
         <p:nvSpPr>
-          <p:cNvPr id="47" name="Shape 44"/>
-          <p:cNvSpPr/>
-          <p:nvPr/>
-        </p:nvSpPr>
-        <p:spPr>
-          <a:xfrm>
-            <a:off x="713232" y="10122408"/>
+          <p:cNvPr id="55" name="Shape 52"/>
+          <p:cNvSpPr/>
+          <p:nvPr/>
+        </p:nvSpPr>
+        <p:spPr>
+          <a:xfrm>
+            <a:off x="713232" y="10049256"/>
             <a:ext cx="6135624" cy="18288"/>
           </a:xfrm>
           <a:prstGeom prst="rect">
@@ -4641,13 +4877,13 @@
       </p:sp>
       <p:sp>
         <p:nvSpPr>
-          <p:cNvPr id="48" name="Text 45"/>
-          <p:cNvSpPr/>
-          <p:nvPr/>
-        </p:nvSpPr>
-        <p:spPr>
-          <a:xfrm>
-            <a:off x="713232" y="10250424"/>
+          <p:cNvPr id="56" name="Text 53"/>
+          <p:cNvSpPr/>
+          <p:nvPr/>
+        </p:nvSpPr>
+        <p:spPr>
+          <a:xfrm>
+            <a:off x="713232" y="10177272"/>
             <a:ext cx="5586984" cy="182880"/>
           </a:xfrm>
           <a:prstGeom prst="rect">
@@ -4683,13 +4919,13 @@
       </p:sp>
       <p:sp>
         <p:nvSpPr>
-          <p:cNvPr id="49" name="Text 46"/>
-          <p:cNvSpPr/>
-          <p:nvPr/>
-        </p:nvSpPr>
-        <p:spPr>
-          <a:xfrm>
-            <a:off x="6300216" y="10232136"/>
+          <p:cNvPr id="57" name="Text 54"/>
+          <p:cNvSpPr/>
+          <p:nvPr/>
+        </p:nvSpPr>
+        <p:spPr>
+          <a:xfrm>
+            <a:off x="6300216" y="10158984"/>
             <a:ext cx="548640" cy="219456"/>
           </a:xfrm>
           <a:prstGeom prst="rect">
@@ -4778,7 +5014,7 @@
         </p:blipFill>
         <p:spPr>
           <a:xfrm>
-            <a:off x="2889504" y="1970517"/>
+            <a:off x="2889504" y="1787637"/>
             <a:ext cx="1783080" cy="786414"/>
           </a:xfrm>
           <a:prstGeom prst="rect">
@@ -4794,7 +5030,7 @@
         </p:nvSpPr>
         <p:spPr>
           <a:xfrm>
-            <a:off x="713232" y="3488451"/>
+            <a:off x="713232" y="3305571"/>
             <a:ext cx="6135624" cy="786384"/>
           </a:xfrm>
           <a:prstGeom prst="rect">
@@ -4836,7 +5072,7 @@
         </p:nvSpPr>
         <p:spPr>
           <a:xfrm>
-            <a:off x="1175004" y="4658883"/>
+            <a:off x="1175004" y="4476003"/>
             <a:ext cx="5212080" cy="777240"/>
           </a:xfrm>
           <a:prstGeom prst="rect">
@@ -4878,7 +5114,7 @@
         </p:nvSpPr>
         <p:spPr>
           <a:xfrm>
-            <a:off x="1449324" y="6021339"/>
+            <a:off x="1449324" y="5838459"/>
             <a:ext cx="4663440" cy="841248"/>
           </a:xfrm>
           <a:prstGeom prst="roundRect">
@@ -4900,7 +5136,7 @@
         </p:nvSpPr>
         <p:spPr>
           <a:xfrm>
-            <a:off x="1449324" y="6185931"/>
+            <a:off x="1449324" y="6007623"/>
             <a:ext cx="4663440" cy="182880"/>
           </a:xfrm>
           <a:prstGeom prst="rect">
@@ -4944,8 +5180,8 @@
         </p:nvSpPr>
         <p:spPr>
           <a:xfrm>
-            <a:off x="1449324" y="6423675"/>
-            <a:ext cx="4663440" cy="292608"/>
+            <a:off x="1449324" y="6236223"/>
+            <a:ext cx="4663440" cy="274320"/>
           </a:xfrm>
           <a:prstGeom prst="rect">
             <a:avLst/>
@@ -4993,7 +5229,7 @@
         </p:nvSpPr>
         <p:spPr>
           <a:xfrm>
-            <a:off x="1449324" y="7100331"/>
+            <a:off x="1449324" y="6917451"/>
             <a:ext cx="4663440" cy="841248"/>
           </a:xfrm>
           <a:prstGeom prst="roundRect">
@@ -5015,7 +5251,7 @@
         </p:nvSpPr>
         <p:spPr>
           <a:xfrm>
-            <a:off x="1449324" y="7264923"/>
+            <a:off x="1449324" y="7086615"/>
             <a:ext cx="4663440" cy="182880"/>
           </a:xfrm>
           <a:prstGeom prst="rect">
@@ -5059,8 +5295,8 @@
         </p:nvSpPr>
         <p:spPr>
           <a:xfrm>
-            <a:off x="1449324" y="7502667"/>
-            <a:ext cx="4663440" cy="292608"/>
+            <a:off x="1449324" y="7315215"/>
+            <a:ext cx="4663440" cy="274320"/>
           </a:xfrm>
           <a:prstGeom prst="rect">
             <a:avLst/>
@@ -5108,8 +5344,8 @@
         </p:nvSpPr>
         <p:spPr>
           <a:xfrm>
-            <a:off x="2176272" y="9171432"/>
-            <a:ext cx="3209544" cy="18288"/>
+            <a:off x="1632204" y="9043416"/>
+            <a:ext cx="4297680" cy="18288"/>
           </a:xfrm>
           <a:prstGeom prst="rect">
             <a:avLst/>
@@ -5130,7 +5366,7 @@
         </p:nvSpPr>
         <p:spPr>
           <a:xfrm>
-            <a:off x="713232" y="9445752"/>
+            <a:off x="713232" y="9317736"/>
             <a:ext cx="6135624" cy="219456"/>
           </a:xfrm>
           <a:prstGeom prst="rect">
@@ -5158,7 +5394,7 @@
                 <a:ea typeface="Oswald" pitchFamily="34" charset="-122"/>
                 <a:cs typeface="Oswald" pitchFamily="34" charset="-120"/>
               </a:rPr>
-              <a:t>Rua Vila Rica, 1168, 2º andar — Caiçara, Belo Horizonte / MG</a:t>
+              <a:t>Rua Vila Rica, 1168, 2º andar — Caiçara, Belo Horizonte – MG</a:t>
             </a:r>
             <a:endParaRPr lang="en-US" sz="950" dirty="0"/>
           </a:p>
@@ -5174,7 +5410,7 @@
         </p:nvSpPr>
         <p:spPr>
           <a:xfrm>
-            <a:off x="713232" y="9774936"/>
+            <a:off x="713232" y="9646920"/>
             <a:ext cx="6135624" cy="256032"/>
           </a:xfrm>
           <a:prstGeom prst="rect">

--- a/carta-de-apresentacao/carta-de-apresentacao-loop-skate-park.pptx
+++ b/carta-de-apresentacao/carta-de-apresentacao-loop-skate-park.pptx
@@ -1786,7 +1786,7 @@
                 <a:ea typeface="Barlow" pitchFamily="34" charset="-122"/>
                 <a:cs typeface="Barlow" pitchFamily="34" charset="-120"/>
               </a:rPr>
-              <a:t>, uma escola e espaço de convivência dedicado ao skate e ao patins, em Belo Horizonte.</a:t>
+              <a:t>, uma escola e um espaço de convivência dedicados ao skate e aos patins, em Belo Horizonte.</a:t>
             </a:r>
             <a:endParaRPr lang="en-US" sz="1300" dirty="0"/>
           </a:p>
@@ -2006,7 +2006,7 @@
                 <a:ea typeface="Barlow" pitchFamily="34" charset="-122"/>
                 <a:cs typeface="Barlow" pitchFamily="34" charset="-120"/>
               </a:rPr>
-              <a:t>Mais do que uma pista ou uma escola de esporte, queremos construir em Belo Horizonte um espaço onde esporte, cultura, educação, arte e convivência possam caminhar juntos. Acreditamos que o skate e o patins são ferramentas potentes para desenvolver autonomia, confiança, criatividade, respeito e senso de pertencimento.</a:t>
+              <a:t>Mais do que uma pista ou uma escola de esporte, queremos construir em Belo Horizonte um espaço onde esporte, cultura, educação, arte e convivência possam caminhar juntos. Acreditamos que o skate e os patins são ferramentas potentes para desenvolver autonomia, confiança, criatividade, respeito e senso de pertencimento.</a:t>
             </a:r>
             <a:endParaRPr lang="en-US" sz="1100" dirty="0"/>
           </a:p>
@@ -3383,14 +3383,56 @@
       </p:sp>
       <p:sp>
         <p:nvSpPr>
-          <p:cNvPr id="6" name="Shape 3"/>
-          <p:cNvSpPr/>
-          <p:nvPr/>
-        </p:nvSpPr>
-        <p:spPr>
-          <a:xfrm>
-            <a:off x="725932" y="2193086"/>
-            <a:ext cx="2941828" cy="555244"/>
+          <p:cNvPr id="6" name="Text 3"/>
+          <p:cNvSpPr/>
+          <p:nvPr/>
+        </p:nvSpPr>
+        <p:spPr>
+          <a:xfrm>
+            <a:off x="713232" y="2180386"/>
+            <a:ext cx="6135624" cy="270814"/>
+          </a:xfrm>
+          <a:prstGeom prst="rect">
+            <a:avLst/>
+          </a:prstGeom>
+          <a:noFill/>
+          <a:ln/>
+        </p:spPr>
+        <p:txBody>
+          <a:bodyPr wrap="square" lIns="0" tIns="0" rIns="0" bIns="0" rtlCol="0" anchor="t"/>
+          <a:lstStyle/>
+          <a:p>
+            <a:pPr indent="0" marL="0">
+              <a:lnSpc>
+                <a:spcPts val="1700"/>
+              </a:lnSpc>
+              <a:buNone/>
+            </a:pPr>
+            <a:r>
+              <a:rPr lang="en-US" sz="1100" dirty="0">
+                <a:solidFill>
+                  <a:srgbClr val="111111"/>
+                </a:solidFill>
+                <a:latin typeface="Barlow" pitchFamily="34" charset="0"/>
+                <a:ea typeface="Barlow" pitchFamily="34" charset="-122"/>
+                <a:cs typeface="Barlow" pitchFamily="34" charset="-120"/>
+              </a:rPr>
+              <a:t>Uma marca parceira pode caminhar com a gente de vários jeitos:</a:t>
+            </a:r>
+            <a:endParaRPr lang="en-US" sz="1100" dirty="0"/>
+          </a:p>
+        </p:txBody>
+      </p:sp>
+      <p:sp>
+        <p:nvSpPr>
+          <p:cNvPr id="7" name="Shape 4"/>
+          <p:cNvSpPr/>
+          <p:nvPr/>
+        </p:nvSpPr>
+        <p:spPr>
+          <a:xfrm>
+            <a:off x="725932" y="2651184"/>
+            <a:ext cx="2941828" cy="518668"/>
           </a:xfrm>
           <a:prstGeom prst="rect">
             <a:avLst/>
@@ -3408,13 +3450,13 @@
       </p:sp>
       <p:sp>
         <p:nvSpPr>
-          <p:cNvPr id="7" name="Shape 4"/>
-          <p:cNvSpPr/>
-          <p:nvPr/>
-        </p:nvSpPr>
-        <p:spPr>
-          <a:xfrm>
-            <a:off x="850392" y="2333548"/>
+          <p:cNvPr id="8" name="Shape 5"/>
+          <p:cNvSpPr/>
+          <p:nvPr/>
+        </p:nvSpPr>
+        <p:spPr>
+          <a:xfrm>
+            <a:off x="850392" y="2773358"/>
             <a:ext cx="274320" cy="274320"/>
           </a:xfrm>
           <a:prstGeom prst="roundRect">
@@ -3435,13 +3477,13 @@
       </p:sp>
       <p:sp>
         <p:nvSpPr>
-          <p:cNvPr id="8" name="Shape 5"/>
-          <p:cNvSpPr/>
-          <p:nvPr/>
-        </p:nvSpPr>
-        <p:spPr>
-          <a:xfrm>
-            <a:off x="918972" y="2466136"/>
+          <p:cNvPr id="9" name="Shape 6"/>
+          <p:cNvSpPr/>
+          <p:nvPr/>
+        </p:nvSpPr>
+        <p:spPr>
+          <a:xfrm>
+            <a:off x="918972" y="2905946"/>
             <a:ext cx="50292" cy="64008"/>
           </a:xfrm>
           <a:prstGeom prst="line">
@@ -3458,13 +3500,13 @@
       </p:sp>
       <p:sp>
         <p:nvSpPr>
-          <p:cNvPr id="9" name="Shape 6"/>
+          <p:cNvPr id="10" name="Shape 7"/>
           <p:cNvSpPr/>
           <p:nvPr/>
         </p:nvSpPr>
         <p:spPr>
           <a:xfrm flipV="1">
-            <a:off x="969264" y="2411272"/>
+            <a:off x="969264" y="2851082"/>
             <a:ext cx="91440" cy="118872"/>
           </a:xfrm>
           <a:prstGeom prst="line">
@@ -3481,14 +3523,14 @@
       </p:sp>
       <p:sp>
         <p:nvSpPr>
-          <p:cNvPr id="10" name="Text 7"/>
-          <p:cNvSpPr/>
-          <p:nvPr/>
-        </p:nvSpPr>
-        <p:spPr>
-          <a:xfrm>
-            <a:off x="1225296" y="2180386"/>
-            <a:ext cx="2327148" cy="580644"/>
+          <p:cNvPr id="11" name="Text 8"/>
+          <p:cNvSpPr/>
+          <p:nvPr/>
+        </p:nvSpPr>
+        <p:spPr>
+          <a:xfrm>
+            <a:off x="1225296" y="2638484"/>
+            <a:ext cx="2327148" cy="544068"/>
           </a:xfrm>
           <a:prstGeom prst="rect">
             <a:avLst/>
@@ -3515,7 +3557,7 @@
                 <a:ea typeface="Barlow" pitchFamily="34" charset="-122"/>
                 <a:cs typeface="Barlow" pitchFamily="34" charset="-120"/>
               </a:rPr>
-              <a:t>Uma marca pode estar presente na pista.</a:t>
+              <a:t>Pode estar presente na pista.</a:t>
             </a:r>
             <a:endParaRPr lang="en-US" sz="1000" dirty="0"/>
           </a:p>
@@ -3523,14 +3565,14 @@
       </p:sp>
       <p:sp>
         <p:nvSpPr>
-          <p:cNvPr id="11" name="Shape 8"/>
-          <p:cNvSpPr/>
-          <p:nvPr/>
-        </p:nvSpPr>
-        <p:spPr>
-          <a:xfrm>
-            <a:off x="3894328" y="2193086"/>
-            <a:ext cx="2941828" cy="555244"/>
+          <p:cNvPr id="12" name="Shape 9"/>
+          <p:cNvSpPr/>
+          <p:nvPr/>
+        </p:nvSpPr>
+        <p:spPr>
+          <a:xfrm>
+            <a:off x="3894328" y="2651184"/>
+            <a:ext cx="2941828" cy="518668"/>
           </a:xfrm>
           <a:prstGeom prst="rect">
             <a:avLst/>
@@ -3548,13 +3590,13 @@
       </p:sp>
       <p:sp>
         <p:nvSpPr>
-          <p:cNvPr id="12" name="Shape 9"/>
-          <p:cNvSpPr/>
-          <p:nvPr/>
-        </p:nvSpPr>
-        <p:spPr>
-          <a:xfrm>
-            <a:off x="4018788" y="2333548"/>
+          <p:cNvPr id="13" name="Shape 10"/>
+          <p:cNvSpPr/>
+          <p:nvPr/>
+        </p:nvSpPr>
+        <p:spPr>
+          <a:xfrm>
+            <a:off x="4018788" y="2773358"/>
             <a:ext cx="274320" cy="274320"/>
           </a:xfrm>
           <a:prstGeom prst="roundRect">
@@ -3575,13 +3617,13 @@
       </p:sp>
       <p:sp>
         <p:nvSpPr>
-          <p:cNvPr id="13" name="Shape 10"/>
-          <p:cNvSpPr/>
-          <p:nvPr/>
-        </p:nvSpPr>
-        <p:spPr>
-          <a:xfrm>
-            <a:off x="4087368" y="2466136"/>
+          <p:cNvPr id="14" name="Shape 11"/>
+          <p:cNvSpPr/>
+          <p:nvPr/>
+        </p:nvSpPr>
+        <p:spPr>
+          <a:xfrm>
+            <a:off x="4087368" y="2905946"/>
             <a:ext cx="50292" cy="64008"/>
           </a:xfrm>
           <a:prstGeom prst="line">
@@ -3598,13 +3640,13 @@
       </p:sp>
       <p:sp>
         <p:nvSpPr>
-          <p:cNvPr id="14" name="Shape 11"/>
+          <p:cNvPr id="15" name="Shape 12"/>
           <p:cNvSpPr/>
           <p:nvPr/>
         </p:nvSpPr>
         <p:spPr>
           <a:xfrm flipV="1">
-            <a:off x="4137660" y="2411272"/>
+            <a:off x="4137660" y="2851082"/>
             <a:ext cx="91440" cy="118872"/>
           </a:xfrm>
           <a:prstGeom prst="line">
@@ -3621,14 +3663,14 @@
       </p:sp>
       <p:sp>
         <p:nvSpPr>
-          <p:cNvPr id="15" name="Text 12"/>
-          <p:cNvSpPr/>
-          <p:nvPr/>
-        </p:nvSpPr>
-        <p:spPr>
-          <a:xfrm>
-            <a:off x="4393692" y="2180386"/>
-            <a:ext cx="2327148" cy="580644"/>
+          <p:cNvPr id="16" name="Text 13"/>
+          <p:cNvSpPr/>
+          <p:nvPr/>
+        </p:nvSpPr>
+        <p:spPr>
+          <a:xfrm>
+            <a:off x="4393692" y="2638484"/>
+            <a:ext cx="2327148" cy="544068"/>
           </a:xfrm>
           <a:prstGeom prst="rect">
             <a:avLst/>
@@ -3663,14 +3705,14 @@
       </p:sp>
       <p:sp>
         <p:nvSpPr>
-          <p:cNvPr id="16" name="Shape 13"/>
-          <p:cNvSpPr/>
-          <p:nvPr/>
-        </p:nvSpPr>
-        <p:spPr>
-          <a:xfrm>
-            <a:off x="725932" y="2874314"/>
-            <a:ext cx="2941828" cy="555244"/>
+          <p:cNvPr id="17" name="Shape 14"/>
+          <p:cNvSpPr/>
+          <p:nvPr/>
+        </p:nvSpPr>
+        <p:spPr>
+          <a:xfrm>
+            <a:off x="725932" y="3277548"/>
+            <a:ext cx="2941828" cy="518668"/>
           </a:xfrm>
           <a:prstGeom prst="rect">
             <a:avLst/>
@@ -3688,13 +3730,13 @@
       </p:sp>
       <p:sp>
         <p:nvSpPr>
-          <p:cNvPr id="17" name="Shape 14"/>
-          <p:cNvSpPr/>
-          <p:nvPr/>
-        </p:nvSpPr>
-        <p:spPr>
-          <a:xfrm>
-            <a:off x="850392" y="3014776"/>
+          <p:cNvPr id="18" name="Shape 15"/>
+          <p:cNvSpPr/>
+          <p:nvPr/>
+        </p:nvSpPr>
+        <p:spPr>
+          <a:xfrm>
+            <a:off x="850392" y="3399722"/>
             <a:ext cx="274320" cy="274320"/>
           </a:xfrm>
           <a:prstGeom prst="roundRect">
@@ -3715,13 +3757,13 @@
       </p:sp>
       <p:sp>
         <p:nvSpPr>
-          <p:cNvPr id="18" name="Shape 15"/>
-          <p:cNvSpPr/>
-          <p:nvPr/>
-        </p:nvSpPr>
-        <p:spPr>
-          <a:xfrm>
-            <a:off x="918972" y="3147364"/>
+          <p:cNvPr id="19" name="Shape 16"/>
+          <p:cNvSpPr/>
+          <p:nvPr/>
+        </p:nvSpPr>
+        <p:spPr>
+          <a:xfrm>
+            <a:off x="918972" y="3532310"/>
             <a:ext cx="50292" cy="64008"/>
           </a:xfrm>
           <a:prstGeom prst="line">
@@ -3738,13 +3780,13 @@
       </p:sp>
       <p:sp>
         <p:nvSpPr>
-          <p:cNvPr id="19" name="Shape 16"/>
+          <p:cNvPr id="20" name="Shape 17"/>
           <p:cNvSpPr/>
           <p:nvPr/>
         </p:nvSpPr>
         <p:spPr>
           <a:xfrm flipV="1">
-            <a:off x="969264" y="3092500"/>
+            <a:off x="969264" y="3477446"/>
             <a:ext cx="91440" cy="118872"/>
           </a:xfrm>
           <a:prstGeom prst="line">
@@ -3761,14 +3803,14 @@
       </p:sp>
       <p:sp>
         <p:nvSpPr>
-          <p:cNvPr id="20" name="Text 17"/>
-          <p:cNvSpPr/>
-          <p:nvPr/>
-        </p:nvSpPr>
-        <p:spPr>
-          <a:xfrm>
-            <a:off x="1225296" y="2861614"/>
-            <a:ext cx="2327148" cy="580644"/>
+          <p:cNvPr id="21" name="Text 18"/>
+          <p:cNvSpPr/>
+          <p:nvPr/>
+        </p:nvSpPr>
+        <p:spPr>
+          <a:xfrm>
+            <a:off x="1225296" y="3264848"/>
+            <a:ext cx="2327148" cy="544068"/>
           </a:xfrm>
           <a:prstGeom prst="rect">
             <a:avLst/>
@@ -3803,14 +3845,14 @@
       </p:sp>
       <p:sp>
         <p:nvSpPr>
-          <p:cNvPr id="21" name="Shape 18"/>
-          <p:cNvSpPr/>
-          <p:nvPr/>
-        </p:nvSpPr>
-        <p:spPr>
-          <a:xfrm>
-            <a:off x="3894328" y="2874314"/>
-            <a:ext cx="2941828" cy="555244"/>
+          <p:cNvPr id="22" name="Shape 19"/>
+          <p:cNvSpPr/>
+          <p:nvPr/>
+        </p:nvSpPr>
+        <p:spPr>
+          <a:xfrm>
+            <a:off x="3894328" y="3277548"/>
+            <a:ext cx="2941828" cy="518668"/>
           </a:xfrm>
           <a:prstGeom prst="rect">
             <a:avLst/>
@@ -3828,13 +3870,13 @@
       </p:sp>
       <p:sp>
         <p:nvSpPr>
-          <p:cNvPr id="22" name="Shape 19"/>
-          <p:cNvSpPr/>
-          <p:nvPr/>
-        </p:nvSpPr>
-        <p:spPr>
-          <a:xfrm>
-            <a:off x="4018788" y="3014776"/>
+          <p:cNvPr id="23" name="Shape 20"/>
+          <p:cNvSpPr/>
+          <p:nvPr/>
+        </p:nvSpPr>
+        <p:spPr>
+          <a:xfrm>
+            <a:off x="4018788" y="3399722"/>
             <a:ext cx="274320" cy="274320"/>
           </a:xfrm>
           <a:prstGeom prst="roundRect">
@@ -3855,13 +3897,13 @@
       </p:sp>
       <p:sp>
         <p:nvSpPr>
-          <p:cNvPr id="23" name="Shape 20"/>
-          <p:cNvSpPr/>
-          <p:nvPr/>
-        </p:nvSpPr>
-        <p:spPr>
-          <a:xfrm>
-            <a:off x="4087368" y="3147364"/>
+          <p:cNvPr id="24" name="Shape 21"/>
+          <p:cNvSpPr/>
+          <p:nvPr/>
+        </p:nvSpPr>
+        <p:spPr>
+          <a:xfrm>
+            <a:off x="4087368" y="3532310"/>
             <a:ext cx="50292" cy="64008"/>
           </a:xfrm>
           <a:prstGeom prst="line">
@@ -3878,13 +3920,13 @@
       </p:sp>
       <p:sp>
         <p:nvSpPr>
-          <p:cNvPr id="24" name="Shape 21"/>
+          <p:cNvPr id="25" name="Shape 22"/>
           <p:cNvSpPr/>
           <p:nvPr/>
         </p:nvSpPr>
         <p:spPr>
           <a:xfrm flipV="1">
-            <a:off x="4137660" y="3092500"/>
+            <a:off x="4137660" y="3477446"/>
             <a:ext cx="91440" cy="118872"/>
           </a:xfrm>
           <a:prstGeom prst="line">
@@ -3901,14 +3943,14 @@
       </p:sp>
       <p:sp>
         <p:nvSpPr>
-          <p:cNvPr id="25" name="Text 22"/>
-          <p:cNvSpPr/>
-          <p:nvPr/>
-        </p:nvSpPr>
-        <p:spPr>
-          <a:xfrm>
-            <a:off x="4393692" y="2861614"/>
-            <a:ext cx="2327148" cy="580644"/>
+          <p:cNvPr id="26" name="Text 23"/>
+          <p:cNvSpPr/>
+          <p:nvPr/>
+        </p:nvSpPr>
+        <p:spPr>
+          <a:xfrm>
+            <a:off x="4393692" y="3264848"/>
+            <a:ext cx="2327148" cy="544068"/>
           </a:xfrm>
           <a:prstGeom prst="rect">
             <a:avLst/>
@@ -3943,14 +3985,14 @@
       </p:sp>
       <p:sp>
         <p:nvSpPr>
-          <p:cNvPr id="26" name="Shape 23"/>
-          <p:cNvSpPr/>
-          <p:nvPr/>
-        </p:nvSpPr>
-        <p:spPr>
-          <a:xfrm>
-            <a:off x="725932" y="3555542"/>
-            <a:ext cx="2941828" cy="555244"/>
+          <p:cNvPr id="27" name="Shape 24"/>
+          <p:cNvSpPr/>
+          <p:nvPr/>
+        </p:nvSpPr>
+        <p:spPr>
+          <a:xfrm>
+            <a:off x="725932" y="3903912"/>
+            <a:ext cx="2941828" cy="518668"/>
           </a:xfrm>
           <a:prstGeom prst="rect">
             <a:avLst/>
@@ -3968,13 +4010,13 @@
       </p:sp>
       <p:sp>
         <p:nvSpPr>
-          <p:cNvPr id="27" name="Shape 24"/>
-          <p:cNvSpPr/>
-          <p:nvPr/>
-        </p:nvSpPr>
-        <p:spPr>
-          <a:xfrm>
-            <a:off x="850392" y="3696004"/>
+          <p:cNvPr id="28" name="Shape 25"/>
+          <p:cNvSpPr/>
+          <p:nvPr/>
+        </p:nvSpPr>
+        <p:spPr>
+          <a:xfrm>
+            <a:off x="850392" y="4026086"/>
             <a:ext cx="274320" cy="274320"/>
           </a:xfrm>
           <a:prstGeom prst="roundRect">
@@ -3995,13 +4037,13 @@
       </p:sp>
       <p:sp>
         <p:nvSpPr>
-          <p:cNvPr id="28" name="Shape 25"/>
-          <p:cNvSpPr/>
-          <p:nvPr/>
-        </p:nvSpPr>
-        <p:spPr>
-          <a:xfrm>
-            <a:off x="918972" y="3828592"/>
+          <p:cNvPr id="29" name="Shape 26"/>
+          <p:cNvSpPr/>
+          <p:nvPr/>
+        </p:nvSpPr>
+        <p:spPr>
+          <a:xfrm>
+            <a:off x="918972" y="4158674"/>
             <a:ext cx="50292" cy="64008"/>
           </a:xfrm>
           <a:prstGeom prst="line">
@@ -4018,13 +4060,13 @@
       </p:sp>
       <p:sp>
         <p:nvSpPr>
-          <p:cNvPr id="29" name="Shape 26"/>
+          <p:cNvPr id="30" name="Shape 27"/>
           <p:cNvSpPr/>
           <p:nvPr/>
         </p:nvSpPr>
         <p:spPr>
           <a:xfrm flipV="1">
-            <a:off x="969264" y="3773728"/>
+            <a:off x="969264" y="4103810"/>
             <a:ext cx="91440" cy="118872"/>
           </a:xfrm>
           <a:prstGeom prst="line">
@@ -4041,14 +4083,14 @@
       </p:sp>
       <p:sp>
         <p:nvSpPr>
-          <p:cNvPr id="30" name="Text 27"/>
-          <p:cNvSpPr/>
-          <p:nvPr/>
-        </p:nvSpPr>
-        <p:spPr>
-          <a:xfrm>
-            <a:off x="1225296" y="3542842"/>
-            <a:ext cx="2327148" cy="580644"/>
+          <p:cNvPr id="31" name="Text 28"/>
+          <p:cNvSpPr/>
+          <p:nvPr/>
+        </p:nvSpPr>
+        <p:spPr>
+          <a:xfrm>
+            <a:off x="1225296" y="3891212"/>
+            <a:ext cx="2327148" cy="544068"/>
           </a:xfrm>
           <a:prstGeom prst="rect">
             <a:avLst/>
@@ -4083,14 +4125,14 @@
       </p:sp>
       <p:sp>
         <p:nvSpPr>
-          <p:cNvPr id="31" name="Shape 28"/>
-          <p:cNvSpPr/>
-          <p:nvPr/>
-        </p:nvSpPr>
-        <p:spPr>
-          <a:xfrm>
-            <a:off x="3894328" y="3555542"/>
-            <a:ext cx="2941828" cy="555244"/>
+          <p:cNvPr id="32" name="Shape 29"/>
+          <p:cNvSpPr/>
+          <p:nvPr/>
+        </p:nvSpPr>
+        <p:spPr>
+          <a:xfrm>
+            <a:off x="3894328" y="3903912"/>
+            <a:ext cx="2941828" cy="518668"/>
           </a:xfrm>
           <a:prstGeom prst="rect">
             <a:avLst/>
@@ -4108,13 +4150,13 @@
       </p:sp>
       <p:sp>
         <p:nvSpPr>
-          <p:cNvPr id="32" name="Shape 29"/>
-          <p:cNvSpPr/>
-          <p:nvPr/>
-        </p:nvSpPr>
-        <p:spPr>
-          <a:xfrm>
-            <a:off x="4018788" y="3696004"/>
+          <p:cNvPr id="33" name="Shape 30"/>
+          <p:cNvSpPr/>
+          <p:nvPr/>
+        </p:nvSpPr>
+        <p:spPr>
+          <a:xfrm>
+            <a:off x="4018788" y="4026086"/>
             <a:ext cx="274320" cy="274320"/>
           </a:xfrm>
           <a:prstGeom prst="roundRect">
@@ -4135,13 +4177,13 @@
       </p:sp>
       <p:sp>
         <p:nvSpPr>
-          <p:cNvPr id="33" name="Shape 30"/>
-          <p:cNvSpPr/>
-          <p:nvPr/>
-        </p:nvSpPr>
-        <p:spPr>
-          <a:xfrm>
-            <a:off x="4087368" y="3828592"/>
+          <p:cNvPr id="34" name="Shape 31"/>
+          <p:cNvSpPr/>
+          <p:nvPr/>
+        </p:nvSpPr>
+        <p:spPr>
+          <a:xfrm>
+            <a:off x="4087368" y="4158674"/>
             <a:ext cx="50292" cy="64008"/>
           </a:xfrm>
           <a:prstGeom prst="line">
@@ -4158,13 +4200,13 @@
       </p:sp>
       <p:sp>
         <p:nvSpPr>
-          <p:cNvPr id="34" name="Shape 31"/>
+          <p:cNvPr id="35" name="Shape 32"/>
           <p:cNvSpPr/>
           <p:nvPr/>
         </p:nvSpPr>
         <p:spPr>
           <a:xfrm flipV="1">
-            <a:off x="4137660" y="3773728"/>
+            <a:off x="4137660" y="4103810"/>
             <a:ext cx="91440" cy="118872"/>
           </a:xfrm>
           <a:prstGeom prst="line">
@@ -4181,14 +4223,14 @@
       </p:sp>
       <p:sp>
         <p:nvSpPr>
-          <p:cNvPr id="35" name="Text 32"/>
-          <p:cNvSpPr/>
-          <p:nvPr/>
-        </p:nvSpPr>
-        <p:spPr>
-          <a:xfrm>
-            <a:off x="4393692" y="3542842"/>
-            <a:ext cx="2327148" cy="580644"/>
+          <p:cNvPr id="36" name="Text 33"/>
+          <p:cNvSpPr/>
+          <p:nvPr/>
+        </p:nvSpPr>
+        <p:spPr>
+          <a:xfrm>
+            <a:off x="4393692" y="3891212"/>
+            <a:ext cx="2327148" cy="544068"/>
           </a:xfrm>
           <a:prstGeom prst="rect">
             <a:avLst/>
@@ -4223,14 +4265,14 @@
       </p:sp>
       <p:sp>
         <p:nvSpPr>
-          <p:cNvPr id="36" name="Shape 33"/>
-          <p:cNvSpPr/>
-          <p:nvPr/>
-        </p:nvSpPr>
-        <p:spPr>
-          <a:xfrm>
-            <a:off x="725932" y="4236770"/>
-            <a:ext cx="2941828" cy="555244"/>
+          <p:cNvPr id="37" name="Shape 34"/>
+          <p:cNvSpPr/>
+          <p:nvPr/>
+        </p:nvSpPr>
+        <p:spPr>
+          <a:xfrm>
+            <a:off x="725932" y="4530276"/>
+            <a:ext cx="2941828" cy="518668"/>
           </a:xfrm>
           <a:prstGeom prst="rect">
             <a:avLst/>
@@ -4248,13 +4290,13 @@
       </p:sp>
       <p:sp>
         <p:nvSpPr>
-          <p:cNvPr id="37" name="Shape 34"/>
-          <p:cNvSpPr/>
-          <p:nvPr/>
-        </p:nvSpPr>
-        <p:spPr>
-          <a:xfrm>
-            <a:off x="850392" y="4377232"/>
+          <p:cNvPr id="38" name="Shape 35"/>
+          <p:cNvSpPr/>
+          <p:nvPr/>
+        </p:nvSpPr>
+        <p:spPr>
+          <a:xfrm>
+            <a:off x="850392" y="4652450"/>
             <a:ext cx="274320" cy="274320"/>
           </a:xfrm>
           <a:prstGeom prst="roundRect">
@@ -4275,13 +4317,13 @@
       </p:sp>
       <p:sp>
         <p:nvSpPr>
-          <p:cNvPr id="38" name="Shape 35"/>
-          <p:cNvSpPr/>
-          <p:nvPr/>
-        </p:nvSpPr>
-        <p:spPr>
-          <a:xfrm>
-            <a:off x="918972" y="4509820"/>
+          <p:cNvPr id="39" name="Shape 36"/>
+          <p:cNvSpPr/>
+          <p:nvPr/>
+        </p:nvSpPr>
+        <p:spPr>
+          <a:xfrm>
+            <a:off x="918972" y="4785038"/>
             <a:ext cx="50292" cy="64008"/>
           </a:xfrm>
           <a:prstGeom prst="line">
@@ -4298,13 +4340,13 @@
       </p:sp>
       <p:sp>
         <p:nvSpPr>
-          <p:cNvPr id="39" name="Shape 36"/>
+          <p:cNvPr id="40" name="Shape 37"/>
           <p:cNvSpPr/>
           <p:nvPr/>
         </p:nvSpPr>
         <p:spPr>
           <a:xfrm flipV="1">
-            <a:off x="969264" y="4454956"/>
+            <a:off x="969264" y="4730174"/>
             <a:ext cx="91440" cy="118872"/>
           </a:xfrm>
           <a:prstGeom prst="line">
@@ -4321,14 +4363,14 @@
       </p:sp>
       <p:sp>
         <p:nvSpPr>
-          <p:cNvPr id="40" name="Text 37"/>
-          <p:cNvSpPr/>
-          <p:nvPr/>
-        </p:nvSpPr>
-        <p:spPr>
-          <a:xfrm>
-            <a:off x="1225296" y="4224070"/>
-            <a:ext cx="2327148" cy="580644"/>
+          <p:cNvPr id="41" name="Text 38"/>
+          <p:cNvSpPr/>
+          <p:nvPr/>
+        </p:nvSpPr>
+        <p:spPr>
+          <a:xfrm>
+            <a:off x="1225296" y="4517576"/>
+            <a:ext cx="2327148" cy="544068"/>
           </a:xfrm>
           <a:prstGeom prst="rect">
             <a:avLst/>
@@ -4363,14 +4405,14 @@
       </p:sp>
       <p:sp>
         <p:nvSpPr>
-          <p:cNvPr id="41" name="Shape 38"/>
-          <p:cNvSpPr/>
-          <p:nvPr/>
-        </p:nvSpPr>
-        <p:spPr>
-          <a:xfrm>
-            <a:off x="3894328" y="4236770"/>
-            <a:ext cx="2941828" cy="555244"/>
+          <p:cNvPr id="42" name="Shape 39"/>
+          <p:cNvSpPr/>
+          <p:nvPr/>
+        </p:nvSpPr>
+        <p:spPr>
+          <a:xfrm>
+            <a:off x="3894328" y="4530276"/>
+            <a:ext cx="2941828" cy="518668"/>
           </a:xfrm>
           <a:prstGeom prst="rect">
             <a:avLst/>
@@ -4388,13 +4430,13 @@
       </p:sp>
       <p:sp>
         <p:nvSpPr>
-          <p:cNvPr id="42" name="Shape 39"/>
-          <p:cNvSpPr/>
-          <p:nvPr/>
-        </p:nvSpPr>
-        <p:spPr>
-          <a:xfrm>
-            <a:off x="4018788" y="4377232"/>
+          <p:cNvPr id="43" name="Shape 40"/>
+          <p:cNvSpPr/>
+          <p:nvPr/>
+        </p:nvSpPr>
+        <p:spPr>
+          <a:xfrm>
+            <a:off x="4018788" y="4652450"/>
             <a:ext cx="274320" cy="274320"/>
           </a:xfrm>
           <a:prstGeom prst="roundRect">
@@ -4415,13 +4457,13 @@
       </p:sp>
       <p:sp>
         <p:nvSpPr>
-          <p:cNvPr id="43" name="Shape 40"/>
-          <p:cNvSpPr/>
-          <p:nvPr/>
-        </p:nvSpPr>
-        <p:spPr>
-          <a:xfrm>
-            <a:off x="4087368" y="4509820"/>
+          <p:cNvPr id="44" name="Shape 41"/>
+          <p:cNvSpPr/>
+          <p:nvPr/>
+        </p:nvSpPr>
+        <p:spPr>
+          <a:xfrm>
+            <a:off x="4087368" y="4785038"/>
             <a:ext cx="50292" cy="64008"/>
           </a:xfrm>
           <a:prstGeom prst="line">
@@ -4438,13 +4480,13 @@
       </p:sp>
       <p:sp>
         <p:nvSpPr>
-          <p:cNvPr id="44" name="Shape 41"/>
+          <p:cNvPr id="45" name="Shape 42"/>
           <p:cNvSpPr/>
           <p:nvPr/>
         </p:nvSpPr>
         <p:spPr>
           <a:xfrm flipV="1">
-            <a:off x="4137660" y="4454956"/>
+            <a:off x="4137660" y="4730174"/>
             <a:ext cx="91440" cy="118872"/>
           </a:xfrm>
           <a:prstGeom prst="line">
@@ -4461,14 +4503,14 @@
       </p:sp>
       <p:sp>
         <p:nvSpPr>
-          <p:cNvPr id="45" name="Text 42"/>
-          <p:cNvSpPr/>
-          <p:nvPr/>
-        </p:nvSpPr>
-        <p:spPr>
-          <a:xfrm>
-            <a:off x="4393692" y="4224070"/>
-            <a:ext cx="2327148" cy="580644"/>
+          <p:cNvPr id="46" name="Text 43"/>
+          <p:cNvSpPr/>
+          <p:nvPr/>
+        </p:nvSpPr>
+        <p:spPr>
+          <a:xfrm>
+            <a:off x="4393692" y="4517576"/>
+            <a:ext cx="2327148" cy="544068"/>
           </a:xfrm>
           <a:prstGeom prst="rect">
             <a:avLst/>
@@ -4503,13 +4545,13 @@
       </p:sp>
       <p:sp>
         <p:nvSpPr>
-          <p:cNvPr id="46" name="Shape 43"/>
-          <p:cNvSpPr/>
-          <p:nvPr/>
-        </p:nvSpPr>
-        <p:spPr>
-          <a:xfrm>
-            <a:off x="713232" y="5125384"/>
+          <p:cNvPr id="47" name="Shape 44"/>
+          <p:cNvSpPr/>
+          <p:nvPr/>
+        </p:nvSpPr>
+        <p:spPr>
+          <a:xfrm>
+            <a:off x="713232" y="5322419"/>
             <a:ext cx="6135624" cy="983587"/>
           </a:xfrm>
           <a:prstGeom prst="roundRect">
@@ -4525,13 +4567,13 @@
       </p:sp>
       <p:sp>
         <p:nvSpPr>
-          <p:cNvPr id="47" name="Text 44"/>
-          <p:cNvSpPr/>
-          <p:nvPr/>
-        </p:nvSpPr>
-        <p:spPr>
-          <a:xfrm>
-            <a:off x="1042416" y="5125384"/>
+          <p:cNvPr id="48" name="Text 45"/>
+          <p:cNvSpPr/>
+          <p:nvPr/>
+        </p:nvSpPr>
+        <p:spPr>
+          <a:xfrm>
+            <a:off x="1042416" y="5322419"/>
             <a:ext cx="5477256" cy="983587"/>
           </a:xfrm>
           <a:prstGeom prst="rect">
@@ -4587,13 +4629,13 @@
       </p:sp>
       <p:sp>
         <p:nvSpPr>
-          <p:cNvPr id="48" name="Shape 45"/>
+          <p:cNvPr id="49" name="Shape 46"/>
           <p:cNvSpPr/>
           <p:nvPr/>
         </p:nvSpPr>
         <p:spPr>
           <a:xfrm rot="10800000">
-            <a:off x="6245352" y="6099828"/>
+            <a:off x="6245352" y="6296862"/>
             <a:ext cx="237744" cy="182880"/>
           </a:xfrm>
           <a:prstGeom prst="triangle">
@@ -4607,13 +4649,13 @@
       </p:sp>
       <p:sp>
         <p:nvSpPr>
-          <p:cNvPr id="49" name="Text 46"/>
-          <p:cNvSpPr/>
-          <p:nvPr/>
-        </p:nvSpPr>
-        <p:spPr>
-          <a:xfrm>
-            <a:off x="713232" y="6449684"/>
+          <p:cNvPr id="50" name="Text 47"/>
+          <p:cNvSpPr/>
+          <p:nvPr/>
+        </p:nvSpPr>
+        <p:spPr>
+          <a:xfrm>
+            <a:off x="713232" y="6585409"/>
             <a:ext cx="6135624" cy="702713"/>
           </a:xfrm>
           <a:prstGeom prst="rect">
@@ -4649,13 +4691,13 @@
       </p:sp>
       <p:sp>
         <p:nvSpPr>
-          <p:cNvPr id="50" name="Text 47"/>
-          <p:cNvSpPr/>
-          <p:nvPr/>
-        </p:nvSpPr>
-        <p:spPr>
-          <a:xfrm>
-            <a:off x="713232" y="7277911"/>
+          <p:cNvPr id="51" name="Text 48"/>
+          <p:cNvSpPr/>
+          <p:nvPr/>
+        </p:nvSpPr>
+        <p:spPr>
+          <a:xfrm>
+            <a:off x="713232" y="7382272"/>
             <a:ext cx="6135624" cy="270814"/>
           </a:xfrm>
           <a:prstGeom prst="rect">
@@ -4691,13 +4733,13 @@
       </p:sp>
       <p:sp>
         <p:nvSpPr>
-          <p:cNvPr id="51" name="Text 48"/>
-          <p:cNvSpPr/>
-          <p:nvPr/>
-        </p:nvSpPr>
-        <p:spPr>
-          <a:xfrm>
-            <a:off x="713232" y="7674238"/>
+          <p:cNvPr id="52" name="Text 49"/>
+          <p:cNvSpPr/>
+          <p:nvPr/>
+        </p:nvSpPr>
+        <p:spPr>
+          <a:xfrm>
+            <a:off x="713232" y="7747236"/>
             <a:ext cx="6135624" cy="702713"/>
           </a:xfrm>
           <a:prstGeom prst="rect">
@@ -4733,13 +4775,13 @@
       </p:sp>
       <p:sp>
         <p:nvSpPr>
-          <p:cNvPr id="52" name="Shape 49"/>
-          <p:cNvSpPr/>
-          <p:nvPr/>
-        </p:nvSpPr>
-        <p:spPr>
-          <a:xfrm>
-            <a:off x="713232" y="8602673"/>
+          <p:cNvPr id="53" name="Shape 50"/>
+          <p:cNvSpPr/>
+          <p:nvPr/>
+        </p:nvSpPr>
+        <p:spPr>
+          <a:xfrm>
+            <a:off x="713232" y="8618607"/>
             <a:ext cx="6135624" cy="32004"/>
           </a:xfrm>
           <a:prstGeom prst="rect">
@@ -4753,13 +4795,13 @@
       </p:sp>
       <p:sp>
         <p:nvSpPr>
-          <p:cNvPr id="53" name="Text 50"/>
-          <p:cNvSpPr/>
-          <p:nvPr/>
-        </p:nvSpPr>
-        <p:spPr>
-          <a:xfrm>
-            <a:off x="713232" y="8876993"/>
+          <p:cNvPr id="54" name="Text 51"/>
+          <p:cNvSpPr/>
+          <p:nvPr/>
+        </p:nvSpPr>
+        <p:spPr>
+          <a:xfrm>
+            <a:off x="713232" y="8892927"/>
             <a:ext cx="6135624" cy="365760"/>
           </a:xfrm>
           <a:prstGeom prst="rect">
@@ -4795,13 +4837,13 @@
       </p:sp>
       <p:sp>
         <p:nvSpPr>
-          <p:cNvPr id="54" name="Text 51"/>
-          <p:cNvSpPr/>
-          <p:nvPr/>
-        </p:nvSpPr>
-        <p:spPr>
-          <a:xfrm>
-            <a:off x="713232" y="9279329"/>
+          <p:cNvPr id="55" name="Text 52"/>
+          <p:cNvSpPr/>
+          <p:nvPr/>
+        </p:nvSpPr>
+        <p:spPr>
+          <a:xfrm>
+            <a:off x="713232" y="9295263"/>
             <a:ext cx="6135624" cy="420624"/>
           </a:xfrm>
           <a:prstGeom prst="rect">
@@ -4857,7 +4899,7 @@
       </p:sp>
       <p:sp>
         <p:nvSpPr>
-          <p:cNvPr id="55" name="Shape 52"/>
+          <p:cNvPr id="56" name="Shape 53"/>
           <p:cNvSpPr/>
           <p:nvPr/>
         </p:nvSpPr>
@@ -4877,7 +4919,7 @@
       </p:sp>
       <p:sp>
         <p:nvSpPr>
-          <p:cNvPr id="56" name="Text 53"/>
+          <p:cNvPr id="57" name="Text 54"/>
           <p:cNvSpPr/>
           <p:nvPr/>
         </p:nvSpPr>
@@ -4919,7 +4961,7 @@
       </p:sp>
       <p:sp>
         <p:nvSpPr>
-          <p:cNvPr id="57" name="Text 54"/>
+          <p:cNvPr id="58" name="Text 55"/>
           <p:cNvSpPr/>
           <p:nvPr/>
         </p:nvSpPr>
